--- a/Progression_P3/P3-L12_Review_and_Unit_Assessment_Travel_Holidays_and_Transport.pptx
+++ b/Progression_P3/P3-L12_Review_and_Unit_Assessment_Travel_Holidays_and_Transport.pptx
@@ -626,7 +626,11 @@
           <a:lstStyle/>
           <a:p>
             <a:r>
-              <a:rPr lang="en-US" dirty="0"/>
+              <a:rPr lang="ar-SA" dirty="0">
+                <a:latin typeface="Amiri" pitchFamily="2" charset="-78"/>
+                <a:ea typeface="Amiri" pitchFamily="2" charset="-78"/>
+                <a:cs typeface="Amiri" pitchFamily="2" charset="-78"/>
+              </a:rPr>
               <a:t>LISTENING TEXT 1 · QUESTIONS 5–8 (website Part A, 20 marks). Before listening: label each question C / R / P / O and write the signal (سَـ / لَـ · قَالَ · كَانَ قَدْ · أَرَى) — P3-L10. Question 5: the la- result = a regret. Question 6 is a number: نَحْوَ مِلْيُونِ = about a million. Question 8 asks for the traveller’s OWN view (أَرَى أَنَّ). Each recording may be played twice; students answer after the second reading.
 SCRIPT: يَقُولُ المُسَافِرُ: كُنْتُ قَدْ حَجَزْتُ رِحْلَتِي إِلَى الأُرْدُنِّ قَبْلَ شَهْرَيْنِ، وَكُنْتُ قَدْ أَقَمْتُ فِي فُنْدُقٍ صَغِيرٍ فِي عَمَّانَ. قَالَ الدَّلِيلُ إِنَّ أَفْضَلَ وَقْتٍ لِزِيَارَةِ البَتْرَاءِ هُوَ الصَّبَاحُ البَاكِرُ. اسْتَعْمَلْتُ الحَافِلَةَ السِّيَاحِيَّةَ الَّتِي تَصِلُ بَيْنَ المُدُنِ. إِذَا زُرْتُ الأُرْدُنَّ ثَانِيَةً، سَأُخَصِّصُ يَوْمَيْنِ لِلْبَتْرَاءِ. وَلَوْ كُنْتُ قَدْ بَقِيتُ لَيْلَةً إِضَافِيَّةً، لَرَأَيْتُ الخَزْنَةَ تَحْتَ ضَوْءِ الشُّمُوعِ. وَتَسْتَقْطِبُ البَتْرَاءُ نَحْوَ مِلْيُونِ زَائِرٍ سَنَوِيًّا. وَأَرَى أَنَّ السِّيَاحَةَ المُسْتَدَامَةَ ضَرُورَةٌ لِحِمَايَةِ هٰذَا التُّرَاثِ.
 Private chat: 4 letters.</a:t>
@@ -716,7 +720,11 @@
           <a:lstStyle/>
           <a:p>
             <a:r>
-              <a:rPr lang="en-US" dirty="0"/>
+              <a:rPr lang="ar-SA" dirty="0">
+                <a:latin typeface="Amiri" pitchFamily="2" charset="-78"/>
+                <a:ea typeface="Amiri" pitchFamily="2" charset="-78"/>
+                <a:cs typeface="Amiri" pitchFamily="2" charset="-78"/>
+              </a:rPr>
               <a:t>Mark /4. Reveal the script only after the attempt; ask which signal (the result marker sa- / la- · كَانَ قَدْ · a reporting verb · أَرَى أَنَّ · a speaker’s name) proved each answer.</a:t>
             </a:r>
             <a:endParaRPr lang="en-US" dirty="0"/>
@@ -804,7 +812,11 @@
           <a:lstStyle/>
           <a:p>
             <a:r>
-              <a:rPr lang="en-US" dirty="0"/>
+              <a:rPr lang="ar-SA" dirty="0">
+                <a:latin typeface="Amiri" pitchFamily="2" charset="-78"/>
+                <a:ea typeface="Amiri" pitchFamily="2" charset="-78"/>
+                <a:cs typeface="Amiri" pitchFamily="2" charset="-78"/>
+              </a:rPr>
               <a:t>LISTENING TEXT 2 · 6 QUESTIONS (website Part A, 20 marks). Before listening: label each question C / R / P / O and write the signal (سَـ / لَـ · قَالَ · كَانَ قَدْ · أَرَى) — P3-L10. Attribution: write S / L / both beside each question while listening — listen for the name before each line. Each recording may be played twice; students answer after the second reading.
 SCRIPT: سَامِي: تُسْهِمُ السِّيَاحَةُ فِي الاقْتِصَادِ المَحَلِّيِّ وَتُوَفِّرُ فُرَصَ عَمَلٍ. لَيْلَى: أَتَّفِقُ، لٰكِنْ إِذَا لَمْ نُنَظِّمِ الزِّيَارَاتِ، سَيَتَدَهْوَرُ التُّرَاثُ. سَامِي: وَلَوِ اعْتَمَدَتِ الدُّوَلُ نِظَامَ الحِصَصِ مُبَكِّرًا، لَكَانَتِ المَوَاقِعُ أَفْضَلَ حَالًا. لَيْلَى: وَقَالَ خَبِيرٌ إِنَّ مَسْؤُولِيَّةَ السَّائِحِ لَا تَقِلُّ عَنْ سِيَاسَةِ الدَّوْلَةِ. سَامِي: وَيُسْتَحْسَنُ أَنْ يَحْتَرِمَ الزَّائِرُ العَادَاتِ المَحَلِّيَّةَ. لَيْلَى: وَأَنَا أَرَى أَنَّ التَّوْعِيَةَ هِيَ الحَلُّ.
 Private chat: 6 letters.</a:t>
@@ -894,7 +906,11 @@
           <a:lstStyle/>
           <a:p>
             <a:r>
-              <a:rPr lang="en-US" dirty="0"/>
+              <a:rPr lang="ar-SA" dirty="0">
+                <a:latin typeface="Amiri" pitchFamily="2" charset="-78"/>
+                <a:ea typeface="Amiri" pitchFamily="2" charset="-78"/>
+                <a:cs typeface="Amiri" pitchFamily="2" charset="-78"/>
+              </a:rPr>
               <a:t>Mark /6. Reveal the script only after the attempt; ask which signal (the result marker sa- / la- · كَانَ قَدْ · a reporting verb · أَرَى أَنَّ · a speaker’s name) proved each answer.</a:t>
             </a:r>
             <a:endParaRPr lang="en-US" dirty="0"/>
@@ -982,7 +998,11 @@
           <a:lstStyle/>
           <a:p>
             <a:r>
-              <a:rPr lang="en-US" dirty="0"/>
+              <a:rPr lang="ar-SA" dirty="0">
+                <a:latin typeface="Amiri" pitchFamily="2" charset="-78"/>
+                <a:ea typeface="Amiri" pitchFamily="2" charset="-78"/>
+                <a:cs typeface="Amiri" pitchFamily="2" charset="-78"/>
+              </a:rPr>
               <a:t>LISTENING TEXT 3 · 6 QUESTIONS (website Part A, 20 marks). Before listening: label each question C / R / P / O and write the signal (سَـ / لَـ · قَالَ · كَانَ قَدْ · أَرَى) — P3-L10. Listen for the reporting verbs (أَكَّدَ · أَشَارَ إِلَى · قَالَ إِنَّ · اعْتَرَفَ بِـ), كَانَتْ قَدْ and the two conditionals (sa- / la-). Each recording may be played twice; students answer after the second reading.
 SCRIPT: يَقُولُ مَسْؤُولٌ فِي هَيْئَةِ النَّقْلِ: كَانَتِ الهَيْئَةُ قَدْ أَطْلَقَتْ مَشْرُوعَ الخَطِّ الحَدِيدِيِّ السَّرِيعِ قَبْلَ سَنَوَاتٍ. وَأَكَّدَ أَنَّ المَشْرُوعَ قَلَّصَ وَقْتَ السَّفَرِ بَيْنَ المُدُنِ الكُبْرَى. وَأَشَارَ إِلَى أَنَّ القِطَارَ يَصِلُ بَيْنَ العَاصِمَةِ وَالسَّاحِلِ فِي سَاعَتَيْنِ. وَقَالَ إِنَّهُ إِذَا اعْتَمَدْنَا عَلَى النَّقْلِ الكَهْرَبَائِيِّ، سَتَنْخَفِضُ الانْبِعَاثَاتُ. وَاعْتَرَفَ بِأَنَّ البُنْيَةَ التَّحْتِيَّةَ تَحْتَاجُ إِلَى مَزِيدٍ مِنَ الاسْتِثْمَارِ. وَلَوْ بَدَأَ المَشْرُوعُ مُبَكِّرًا، لَكَانَ الرَّبْطُ أَوْسَعَ اليَوْمَ.
 Private chat: 6 letters.</a:t>
@@ -1072,7 +1092,11 @@
           <a:lstStyle/>
           <a:p>
             <a:r>
-              <a:rPr lang="en-US" dirty="0"/>
+              <a:rPr lang="ar-SA" dirty="0">
+                <a:latin typeface="Amiri" pitchFamily="2" charset="-78"/>
+                <a:ea typeface="Amiri" pitchFamily="2" charset="-78"/>
+                <a:cs typeface="Amiri" pitchFamily="2" charset="-78"/>
+              </a:rPr>
               <a:t>Mark /6. Reveal the script only after the attempt; ask which signal (the result marker sa- / la- · كَانَ قَدْ · a reporting verb · أَرَى أَنَّ · a speaker’s name) proved each answer.</a:t>
             </a:r>
             <a:endParaRPr lang="en-US" dirty="0"/>
@@ -1160,7 +1184,11 @@
           <a:lstStyle/>
           <a:p>
             <a:r>
-              <a:rPr lang="en-US" dirty="0"/>
+              <a:rPr lang="ar-SA" dirty="0">
+                <a:latin typeface="Amiri" pitchFamily="2" charset="-78"/>
+                <a:ea typeface="Amiri" pitchFamily="2" charset="-78"/>
+                <a:cs typeface="Amiri" pitchFamily="2" charset="-78"/>
+              </a:rPr>
               <a:t>READING TEXT (website Part B1). No English support on assessment texts. Strategy (P3-L08): box every إِذَا and لَوْ, underline the result marker, and ask: does the writer recommend (idhā) or criticise (law)? Website text corrected: وَكَانَ الكَاتِبُ قَدْ زَارَ (the website has an extra قَدْ before كَانَ).</a:t>
             </a:r>
             <a:endParaRPr lang="en-US" dirty="0"/>
@@ -1512,7 +1540,11 @@
           <a:lstStyle/>
           <a:p>
             <a:r>
-              <a:rPr lang="en-US" dirty="0"/>
+              <a:rPr lang="ar-SA" dirty="0">
+                <a:latin typeface="Amiri" pitchFamily="2" charset="-78"/>
+                <a:ea typeface="Amiri" pitchFamily="2" charset="-78"/>
+                <a:cs typeface="Amiri" pitchFamily="2" charset="-78"/>
+              </a:rPr>
               <a:t>WELCOME (1 min) — while students join.
 • Greet each student by name as they arrive: السَّلَامُ عَلَيْكُمْ. Take the register (Pastoral Tracker: attendance 0/1).
 • 2-MINUTE CHECK-IN (SEND training): a private chat to any student who seemed unsettled last lesson — “Are you okay today? 👍 / 👎”.
@@ -1693,7 +1725,11 @@
           <a:lstStyle/>
           <a:p>
             <a:r>
-              <a:rPr lang="en-US" dirty="0"/>
+              <a:rPr lang="ar-SA" dirty="0">
+                <a:latin typeface="Amiri" pitchFamily="2" charset="-78"/>
+                <a:ea typeface="Amiri" pitchFamily="2" charset="-78"/>
+                <a:cs typeface="Amiri" pitchFamily="2" charset="-78"/>
+              </a:rPr>
               <a:t>WRITING QUESTION 1 (website, 5 marks): one mark per field completed accurately in Arabic (a phrase is enough). Field 1 must use يُقِيمُ فِي; field 2 يَحْجِزُ; field 3 كُنْتُ قَدْ + past; field 4 a Type 1 (إِذَا + past → سَـ); field 5 a Type 2 (لَوْ + past → لَـ). Students may describe an imagined trip.</a:t>
             </a:r>
             <a:endParaRPr lang="en-US" dirty="0"/>
@@ -1781,7 +1817,11 @@
           <a:lstStyle/>
           <a:p>
             <a:r>
-              <a:rPr lang="en-US" dirty="0"/>
+              <a:rPr lang="ar-SA" dirty="0">
+                <a:latin typeface="Amiri" pitchFamily="2" charset="-78"/>
+                <a:ea typeface="Amiri" pitchFamily="2" charset="-78"/>
+                <a:cs typeface="Amiri" pitchFamily="2" charset="-78"/>
+              </a:rPr>
               <a:t>WRITING QUESTION 2 (website, 15 marks): a 145–160-word travel article. Required: a past-perfect background, yaḥjiz / yuqīm, a Type 1 recommendation AND a Type 2 reflection (two separate Range marks), reported speech with a verb other than قَالَ, and a tourism verb. Mark scheme exactly as on the website (Accuracy: the لَـ of the Type 2 result 2 · كَانَ / كَانَتْ agreement 2 · إِنَّ / أَنَّ 1). The P3-L09 website model is a full-mark exemplar — show it ONLY after writing.</a:t>
             </a:r>
             <a:endParaRPr lang="en-US" dirty="0"/>
@@ -1869,7 +1909,11 @@
           <a:lstStyle/>
           <a:p>
             <a:r>
-              <a:rPr lang="en-US" dirty="0"/>
+              <a:rPr lang="ar-SA" dirty="0">
+                <a:latin typeface="Amiri" pitchFamily="2" charset="-78"/>
+                <a:ea typeface="Amiri" pitchFamily="2" charset="-78"/>
+                <a:cs typeface="Amiri" pitchFamily="2" charset="-78"/>
+              </a:rPr>
               <a:t>ROLE PLAY (website, 4 marks). Teacher plays a travel agent: أَهْلًا وَسَهْلًا فِي وَكَالَتِنَا. كَيْفَ أُسَاعِدُكَ؟ Model answers: مَا الَّذِي تَتَمَيَّزُ بِهِ فَاسُ؟ (agent: تَتَمَيَّزُ بِأَزِقَّتِهَا وَتَسْتَقْطِبُ آلَافَ السُّيَّاحِ) · أُرِيدُ أَنْ أَحْجِزَ غُرْفَةً؛ أَيْنَ يُمْكِنُ أَنْ أُقِيمَ؟ · فِي رِحْلَتِي السَّابِقَةِ كُنْتُ قَدْ حَجَزْتُ فُنْدُقًا، لٰكِنِّي اكْتَشَفْتُ أَنَّ الحَجْزَ أُلْغِيَ … · إِذَا سَافَرْتُ فِي الرَّبِيعِ، مَاذَا تَنْصَحُنِي؟ Website mark scheme: Communication (2): all four prompts are addressed clearly and relevantly. Accuracy (2): yaḥjiz / yuqīm past forms in prompt 3 and the Type 1 recommendation are formed correctly. The destination is described with yastaqṭib or yatamayyaz bi-. To a girl: اسْأَلِي · صِفِي · وَاجَهْتِهَا · اطْلُبِي.</a:t>
             </a:r>
             <a:endParaRPr lang="en-US" dirty="0"/>
@@ -1957,7 +2001,11 @@
           <a:lstStyle/>
           <a:p>
             <a:r>
-              <a:rPr lang="en-US" dirty="0"/>
+              <a:rPr lang="ar-SA" dirty="0">
+                <a:latin typeface="Amiri" pitchFamily="2" charset="-78"/>
+                <a:ea typeface="Amiri" pitchFamily="2" charset="-78"/>
+                <a:cs typeface="Amiri" pitchFamily="2" charset="-78"/>
+              </a:rPr>
               <a:t>TOPIC CONVERSATION (website, 6 marks): structure · reason · extra (P3-L11). Website mark scheme: Communication (3): answers are developed with point, reason and example. Quality of language (3): the past perfect (Q1), a Type 1 conditional (Q2) and a Type 2 conditional (Q3) all appear and are accurate. Q3 opens with law; a student who answers with idhā is avoiding the conditional — record it and note the missed mark. Allow time-buying and repair phrases (سُؤَالٌ جَمِيلٌ · دَعْنِي أُفَكِّرُ · عَفْوًا، أَقْصِدُ). To a girl: صِفِي · كُنْتِ قَدْ تَوَقَّعْتِهِ · رَأْيُكِ · لَدَيْكِ · سَتَذْهَبِينَ. ORGANISATION: one-to-one while others finish writing, or trusted pairs with the teacher as examiner.</a:t>
             </a:r>
             <a:endParaRPr lang="en-US" dirty="0"/>
@@ -2671,7 +2719,11 @@
           <a:lstStyle/>
           <a:p>
             <a:r>
-              <a:rPr lang="en-US" dirty="0"/>
+              <a:rPr lang="ar-SA" dirty="0">
+                <a:latin typeface="Amiri" pitchFamily="2" charset="-78"/>
+                <a:ea typeface="Amiri" pitchFamily="2" charset="-78"/>
+                <a:cs typeface="Amiri" pitchFamily="2" charset="-78"/>
+              </a:rPr>
               <a:t>REVIEW (website twelve-question grammar spine, correct answers): إِذَا زُرْتَ الأُرْدُنَّ، سَتَنْبَهِرُ · لَوْ حَجَزْتُ مُبَكِّرًا، لَوَفَّرْتُ المَالَ · زُرْتُ · كُنْتُ قَدْ · سَأُقِيمُ · فِي · يَتَعَلَّمَ · قَالَ الدَّلِيلُ إِنَّ · إِلَى · تَسْتَقْطِبُ المَدِينَةُ السُّيَّاحَ · بَيْنَ · كَانَتْ قَدْ أَقَامَتْ. Close the vocabulary vault during each section.</a:t>
             </a:r>
             <a:endParaRPr lang="en-US" dirty="0"/>
@@ -2847,7 +2899,11 @@
           <a:lstStyle/>
           <a:p>
             <a:r>
-              <a:rPr lang="en-US" dirty="0"/>
+              <a:rPr lang="ar-SA" dirty="0">
+                <a:latin typeface="Amiri" pitchFamily="2" charset="-78"/>
+                <a:ea typeface="Amiri" pitchFamily="2" charset="-78"/>
+                <a:cs typeface="Amiri" pitchFamily="2" charset="-78"/>
+              </a:rPr>
               <a:t>LISTENING TEXT 1 · QUESTIONS 1–4 (website Part A, 20 marks). Before listening: label each question C / R / P / O and write the signal (سَـ / لَـ · قَالَ · كَانَ قَدْ · أَرَى) — P3-L10. Question 1: two past perfects (كُنْتُ قَدْ). Question 2: whose view? The guide’s (قَالَ … إِنَّ). Question 4: the sa- result = a real plan. Each recording may be played twice; students answer after the second reading.
 SCRIPT: يَقُولُ المُسَافِرُ: كُنْتُ قَدْ حَجَزْتُ رِحْلَتِي إِلَى الأُرْدُنِّ قَبْلَ شَهْرَيْنِ، وَكُنْتُ قَدْ أَقَمْتُ فِي فُنْدُقٍ صَغِيرٍ فِي عَمَّانَ. قَالَ الدَّلِيلُ إِنَّ أَفْضَلَ وَقْتٍ لِزِيَارَةِ البَتْرَاءِ هُوَ الصَّبَاحُ البَاكِرُ. اسْتَعْمَلْتُ الحَافِلَةَ السِّيَاحِيَّةَ الَّتِي تَصِلُ بَيْنَ المُدُنِ. إِذَا زُرْتُ الأُرْدُنَّ ثَانِيَةً، سَأُخَصِّصُ يَوْمَيْنِ لِلْبَتْرَاءِ. وَلَوْ كُنْتُ قَدْ بَقِيتُ لَيْلَةً إِضَافِيَّةً، لَرَأَيْتُ الخَزْنَةَ تَحْتَ ضَوْءِ الشُّمُوعِ. وَتَسْتَقْطِبُ البَتْرَاءُ نَحْوَ مِلْيُونِ زَائِرٍ سَنَوِيًّا. وَأَرَى أَنَّ السِّيَاحَةَ المُسْتَدَامَةَ ضَرُورَةٌ لِحِمَايَةِ هٰذَا التُّرَاثِ.
 Private chat: 4 letters.</a:t>
@@ -2937,7 +2993,11 @@
           <a:lstStyle/>
           <a:p>
             <a:r>
-              <a:rPr lang="en-US" dirty="0"/>
+              <a:rPr lang="ar-SA" dirty="0">
+                <a:latin typeface="Amiri" pitchFamily="2" charset="-78"/>
+                <a:ea typeface="Amiri" pitchFamily="2" charset="-78"/>
+                <a:cs typeface="Amiri" pitchFamily="2" charset="-78"/>
+              </a:rPr>
               <a:t>Mark /4. Reveal the script only after the attempt; ask which signal (the result marker sa- / la- · كَانَ قَدْ · a reporting verb · أَرَى أَنَّ · a speaker’s name) proved each answer.</a:t>
             </a:r>
             <a:endParaRPr lang="en-US" dirty="0"/>
@@ -3421,6 +3481,7 @@
                   <a:srgbClr val="D4AF37"/>
                 </a:solidFill>
                 <a:latin typeface="Amiri" pitchFamily="2" charset="-78"/>
+                <a:ea typeface="Amiri" pitchFamily="2" charset="-78"/>
                 <a:cs typeface="Amiri" pitchFamily="2" charset="-78"/>
               </a:rPr>
               <a:t>م</a:t>
@@ -3627,6 +3688,7 @@
                   <a:srgbClr val="D4AF37"/>
                 </a:solidFill>
                 <a:latin typeface="Amiri" pitchFamily="2" charset="-78"/>
+                <a:ea typeface="Amiri" pitchFamily="2" charset="-78"/>
                 <a:cs typeface="Amiri" pitchFamily="2" charset="-78"/>
               </a:rPr>
               <a:t>المُرَاجَعَةُ وَتَقْيِيمُ الوَحْدَةِ</a:t>
@@ -4084,6 +4146,7 @@
                   <a:srgbClr val="D4AF37"/>
                 </a:solidFill>
                 <a:latin typeface="Amiri" pitchFamily="2" charset="-78"/>
+                <a:ea typeface="Amiri" pitchFamily="2" charset="-78"/>
                 <a:cs typeface="Amiri" pitchFamily="2" charset="-78"/>
               </a:rPr>
               <a:t>م</a:t>
@@ -4404,6 +4467,7 @@
                   <a:srgbClr val="8A6D1E"/>
                 </a:solidFill>
                 <a:latin typeface="Amiri" pitchFamily="2" charset="-78"/>
+                <a:ea typeface="Amiri" pitchFamily="2" charset="-78"/>
                 <a:cs typeface="Amiri" pitchFamily="2" charset="-78"/>
               </a:rPr>
               <a:t>الاسْتِمَاعُ</a:t>
@@ -6327,6 +6391,7 @@
                   <a:srgbClr val="D4AF37"/>
                 </a:solidFill>
                 <a:latin typeface="Amiri" pitchFamily="2" charset="-78"/>
+                <a:ea typeface="Amiri" pitchFamily="2" charset="-78"/>
                 <a:cs typeface="Amiri" pitchFamily="2" charset="-78"/>
               </a:rPr>
               <a:t>م</a:t>
@@ -6647,6 +6712,7 @@
                   <a:srgbClr val="8A6D1E"/>
                 </a:solidFill>
                 <a:latin typeface="Amiri" pitchFamily="2" charset="-78"/>
+                <a:ea typeface="Amiri" pitchFamily="2" charset="-78"/>
                 <a:cs typeface="Amiri" pitchFamily="2" charset="-78"/>
               </a:rPr>
               <a:t>الإِجَابَاتُ</a:t>
@@ -7188,6 +7254,7 @@
                   <a:srgbClr val="8A6D1E"/>
                 </a:solidFill>
                 <a:latin typeface="Amiri" pitchFamily="2" charset="-78"/>
+                <a:ea typeface="Amiri" pitchFamily="2" charset="-78"/>
                 <a:cs typeface="Amiri" pitchFamily="2" charset="-78"/>
               </a:rPr>
               <a:t>لَوْ كُنْتُ قَدْ بَقِيتُ لَيْلَةً إِضَافِيَّةً، لَرَأَيْتُ الخَزْنَةَ تَحْتَ ضَوْءِ الشُّمُوعِ.</a:t>
@@ -7691,6 +7758,7 @@
                   <a:srgbClr val="8A6D1E"/>
                 </a:solidFill>
                 <a:latin typeface="Amiri" pitchFamily="2" charset="-78"/>
+                <a:ea typeface="Amiri" pitchFamily="2" charset="-78"/>
                 <a:cs typeface="Amiri" pitchFamily="2" charset="-78"/>
               </a:rPr>
               <a:t>تَسْتَقْطِبُ البَتْرَاءُ نَحْوَ مِلْيُونِ زَائِرٍ سَنَوِيًّا.</a:t>
@@ -8194,6 +8262,7 @@
                   <a:srgbClr val="8A6D1E"/>
                 </a:solidFill>
                 <a:latin typeface="Amiri" pitchFamily="2" charset="-78"/>
+                <a:ea typeface="Amiri" pitchFamily="2" charset="-78"/>
                 <a:cs typeface="Amiri" pitchFamily="2" charset="-78"/>
               </a:rPr>
               <a:t>كُنْتُ قَدْ أَقَمْتُ فِي فُنْدُقٍ صَغِيرٍ فِي عَمَّانَ.</a:t>
@@ -8697,6 +8766,7 @@
                   <a:srgbClr val="8A6D1E"/>
                 </a:solidFill>
                 <a:latin typeface="Amiri" pitchFamily="2" charset="-78"/>
+                <a:ea typeface="Amiri" pitchFamily="2" charset="-78"/>
                 <a:cs typeface="Amiri" pitchFamily="2" charset="-78"/>
               </a:rPr>
               <a:t>أَرَى أَنَّ السِّيَاحَةَ المُسْتَدَامَةَ ضَرُورَةٌ لِحِمَايَةِ هٰذَا التُّرَاثِ.</a:t>
@@ -8830,6 +8900,7 @@
                   <a:srgbClr val="D4AF37"/>
                 </a:solidFill>
                 <a:latin typeface="Amiri" pitchFamily="2" charset="-78"/>
+                <a:ea typeface="Amiri" pitchFamily="2" charset="-78"/>
                 <a:cs typeface="Amiri" pitchFamily="2" charset="-78"/>
               </a:rPr>
               <a:t>م</a:t>
@@ -9150,6 +9221,7 @@
                   <a:srgbClr val="8A6D1E"/>
                 </a:solidFill>
                 <a:latin typeface="Amiri" pitchFamily="2" charset="-78"/>
+                <a:ea typeface="Amiri" pitchFamily="2" charset="-78"/>
                 <a:cs typeface="Amiri" pitchFamily="2" charset="-78"/>
               </a:rPr>
               <a:t>الاسْتِمَاعُ</a:t>
@@ -11088,6 +11160,7 @@
                   <a:srgbClr val="1B3B6F"/>
                 </a:solidFill>
                 <a:latin typeface="Amiri" pitchFamily="2" charset="-78"/>
+                <a:ea typeface="Amiri" pitchFamily="2" charset="-78"/>
                 <a:cs typeface="Amiri" pitchFamily="2" charset="-78"/>
               </a:rPr>
               <a:t>يُسْتَحْسَنُ أَنْ</a:t>
@@ -11975,6 +12048,7 @@
                   <a:srgbClr val="D4AF37"/>
                 </a:solidFill>
                 <a:latin typeface="Amiri" pitchFamily="2" charset="-78"/>
+                <a:ea typeface="Amiri" pitchFamily="2" charset="-78"/>
                 <a:cs typeface="Amiri" pitchFamily="2" charset="-78"/>
               </a:rPr>
               <a:t>م</a:t>
@@ -12295,6 +12369,7 @@
                   <a:srgbClr val="8A6D1E"/>
                 </a:solidFill>
                 <a:latin typeface="Amiri" pitchFamily="2" charset="-78"/>
+                <a:ea typeface="Amiri" pitchFamily="2" charset="-78"/>
                 <a:cs typeface="Amiri" pitchFamily="2" charset="-78"/>
               </a:rPr>
               <a:t>الإِجَابَاتُ</a:t>
@@ -12836,6 +12911,7 @@
                   <a:srgbClr val="8A6D1E"/>
                 </a:solidFill>
                 <a:latin typeface="Amiri" pitchFamily="2" charset="-78"/>
+                <a:ea typeface="Amiri" pitchFamily="2" charset="-78"/>
                 <a:cs typeface="Amiri" pitchFamily="2" charset="-78"/>
               </a:rPr>
               <a:t>سَامِي: تُسْهِمُ السِّيَاحَةُ فِي الاقْتِصَادِ المَحَلِّيِّ.</a:t>
@@ -13339,6 +13415,7 @@
                   <a:srgbClr val="8A6D1E"/>
                 </a:solidFill>
                 <a:latin typeface="Amiri" pitchFamily="2" charset="-78"/>
+                <a:ea typeface="Amiri" pitchFamily="2" charset="-78"/>
                 <a:cs typeface="Amiri" pitchFamily="2" charset="-78"/>
               </a:rPr>
               <a:t>لَيْلَى: إِذَا لَمْ نُنَظِّمِ الزِّيَارَاتِ، سَيَتَدَهْوَرُ التُّرَاثُ.</a:t>
@@ -13842,6 +13919,7 @@
                   <a:srgbClr val="8A6D1E"/>
                 </a:solidFill>
                 <a:latin typeface="Amiri" pitchFamily="2" charset="-78"/>
+                <a:ea typeface="Amiri" pitchFamily="2" charset="-78"/>
                 <a:cs typeface="Amiri" pitchFamily="2" charset="-78"/>
               </a:rPr>
               <a:t>سَامِي: وَلَوِ اعْتَمَدَتِ الدُّوَلُ نِظَامَ الحِصَصِ مُبَكِّرًا، لَكَانَتِ المَوَاقِعُ أَفْضَلَ.</a:t>
@@ -14345,6 +14423,7 @@
                   <a:srgbClr val="8A6D1E"/>
                 </a:solidFill>
                 <a:latin typeface="Amiri" pitchFamily="2" charset="-78"/>
+                <a:ea typeface="Amiri" pitchFamily="2" charset="-78"/>
                 <a:cs typeface="Amiri" pitchFamily="2" charset="-78"/>
               </a:rPr>
               <a:t>لَيْلَى: قَالَ خَبِيرٌ إِنَّ مَسْؤُولِيَّةَ السَّائِحِ لَا تَقِلُّ.</a:t>
@@ -14493,6 +14572,7 @@
                   <a:srgbClr val="1B3B6F"/>
                 </a:solidFill>
                 <a:latin typeface="Amiri" pitchFamily="2" charset="-78"/>
+                <a:ea typeface="Amiri" pitchFamily="2" charset="-78"/>
                 <a:cs typeface="Amiri" pitchFamily="2" charset="-78"/>
               </a:rPr>
               <a:t>يُسْتَحْسَنُ أَنْ</a:t>
@@ -14874,6 +14954,7 @@
                   <a:srgbClr val="8A6D1E"/>
                 </a:solidFill>
                 <a:latin typeface="Amiri" pitchFamily="2" charset="-78"/>
+                <a:ea typeface="Amiri" pitchFamily="2" charset="-78"/>
                 <a:cs typeface="Amiri" pitchFamily="2" charset="-78"/>
               </a:rPr>
               <a:t>سَامِي: وَيُسْتَحْسَنُ أَنْ يَحْتَرِمَ الزَّائِرُ العَادَاتِ المَحَلِّيَّةَ.</a:t>
@@ -15377,6 +15458,7 @@
                   <a:srgbClr val="8A6D1E"/>
                 </a:solidFill>
                 <a:latin typeface="Amiri" pitchFamily="2" charset="-78"/>
+                <a:ea typeface="Amiri" pitchFamily="2" charset="-78"/>
                 <a:cs typeface="Amiri" pitchFamily="2" charset="-78"/>
               </a:rPr>
               <a:t>لَيْلَى: وَأَنَا أَرَى أَنَّ التَّوْعِيَةَ هِيَ الحَلُّ.</a:t>
@@ -15510,6 +15592,7 @@
                   <a:srgbClr val="D4AF37"/>
                 </a:solidFill>
                 <a:latin typeface="Amiri" pitchFamily="2" charset="-78"/>
+                <a:ea typeface="Amiri" pitchFamily="2" charset="-78"/>
                 <a:cs typeface="Amiri" pitchFamily="2" charset="-78"/>
               </a:rPr>
               <a:t>م</a:t>
@@ -15830,6 +15913,7 @@
                   <a:srgbClr val="8A6D1E"/>
                 </a:solidFill>
                 <a:latin typeface="Amiri" pitchFamily="2" charset="-78"/>
+                <a:ea typeface="Amiri" pitchFamily="2" charset="-78"/>
                 <a:cs typeface="Amiri" pitchFamily="2" charset="-78"/>
               </a:rPr>
               <a:t>الاسْتِمَاعُ</a:t>
@@ -18629,6 +18713,7 @@
                   <a:srgbClr val="D4AF37"/>
                 </a:solidFill>
                 <a:latin typeface="Amiri" pitchFamily="2" charset="-78"/>
+                <a:ea typeface="Amiri" pitchFamily="2" charset="-78"/>
                 <a:cs typeface="Amiri" pitchFamily="2" charset="-78"/>
               </a:rPr>
               <a:t>م</a:t>
@@ -18949,6 +19034,7 @@
                   <a:srgbClr val="8A6D1E"/>
                 </a:solidFill>
                 <a:latin typeface="Amiri" pitchFamily="2" charset="-78"/>
+                <a:ea typeface="Amiri" pitchFamily="2" charset="-78"/>
                 <a:cs typeface="Amiri" pitchFamily="2" charset="-78"/>
               </a:rPr>
               <a:t>الإِجَابَاتُ</a:t>
@@ -19490,6 +19576,7 @@
                   <a:srgbClr val="8A6D1E"/>
                 </a:solidFill>
                 <a:latin typeface="Amiri" pitchFamily="2" charset="-78"/>
+                <a:ea typeface="Amiri" pitchFamily="2" charset="-78"/>
                 <a:cs typeface="Amiri" pitchFamily="2" charset="-78"/>
               </a:rPr>
               <a:t>كَانَتِ الهَيْئَةُ قَدْ أَطْلَقَتْ مَشْرُوعَ الخَطِّ الحَدِيدِيِّ … قَبْلَ سَنَوَاتٍ.</a:t>
@@ -19993,6 +20080,7 @@
                   <a:srgbClr val="8A6D1E"/>
                 </a:solidFill>
                 <a:latin typeface="Amiri" pitchFamily="2" charset="-78"/>
+                <a:ea typeface="Amiri" pitchFamily="2" charset="-78"/>
                 <a:cs typeface="Amiri" pitchFamily="2" charset="-78"/>
               </a:rPr>
               <a:t>أَكَّدَ أَنَّ المَشْرُوعَ قَلَّصَ وَقْتَ السَّفَرِ.</a:t>
@@ -20496,6 +20584,7 @@
                   <a:srgbClr val="8A6D1E"/>
                 </a:solidFill>
                 <a:latin typeface="Amiri" pitchFamily="2" charset="-78"/>
+                <a:ea typeface="Amiri" pitchFamily="2" charset="-78"/>
                 <a:cs typeface="Amiri" pitchFamily="2" charset="-78"/>
               </a:rPr>
               <a:t>يَصِلُ بَيْنَ العَاصِمَةِ وَالسَّاحِلِ فِي سَاعَتَيْنِ.</a:t>
@@ -20999,6 +21088,7 @@
                   <a:srgbClr val="8A6D1E"/>
                 </a:solidFill>
                 <a:latin typeface="Amiri" pitchFamily="2" charset="-78"/>
+                <a:ea typeface="Amiri" pitchFamily="2" charset="-78"/>
                 <a:cs typeface="Amiri" pitchFamily="2" charset="-78"/>
               </a:rPr>
               <a:t>إِذَا اعْتَمَدْنَا عَلَى النَّقْلِ الكَهْرَبَائِيِّ، سَتَنْخَفِضُ الانْبِعَاثَاتُ.</a:t>
@@ -21502,6 +21592,7 @@
                   <a:srgbClr val="8A6D1E"/>
                 </a:solidFill>
                 <a:latin typeface="Amiri" pitchFamily="2" charset="-78"/>
+                <a:ea typeface="Amiri" pitchFamily="2" charset="-78"/>
                 <a:cs typeface="Amiri" pitchFamily="2" charset="-78"/>
               </a:rPr>
               <a:t>اعْتَرَفَ بِأَنَّ البُنْيَةَ التَّحْتِيَّةَ تَحْتَاجُ إِلَى مَزِيدٍ مِنَ الاسْتِثْمَارِ.</a:t>
@@ -22005,6 +22096,7 @@
                   <a:srgbClr val="8A6D1E"/>
                 </a:solidFill>
                 <a:latin typeface="Amiri" pitchFamily="2" charset="-78"/>
+                <a:ea typeface="Amiri" pitchFamily="2" charset="-78"/>
                 <a:cs typeface="Amiri" pitchFamily="2" charset="-78"/>
               </a:rPr>
               <a:t>لَوْ بَدَأَ المَشْرُوعُ مُبَكِّرًا، لَكَانَ الرَّبْطُ أَوْسَعَ اليَوْمَ.</a:t>
@@ -22138,6 +22230,7 @@
                   <a:srgbClr val="D4AF37"/>
                 </a:solidFill>
                 <a:latin typeface="Amiri" pitchFamily="2" charset="-78"/>
+                <a:ea typeface="Amiri" pitchFamily="2" charset="-78"/>
                 <a:cs typeface="Amiri" pitchFamily="2" charset="-78"/>
               </a:rPr>
               <a:t>م</a:t>
@@ -22458,6 +22551,7 @@
                   <a:srgbClr val="8A6D1E"/>
                 </a:solidFill>
                 <a:latin typeface="Amiri" pitchFamily="2" charset="-78"/>
+                <a:ea typeface="Amiri" pitchFamily="2" charset="-78"/>
                 <a:cs typeface="Amiri" pitchFamily="2" charset="-78"/>
               </a:rPr>
               <a:t>السِّيَاحَةُ المَسْؤُولَةُ</a:t>
@@ -22571,6 +22665,7 @@
                   <a:srgbClr val="1F2A37"/>
                 </a:solidFill>
                 <a:latin typeface="Amiri" pitchFamily="2" charset="-78"/>
+                <a:ea typeface="Amiri" pitchFamily="2" charset="-78"/>
                 <a:cs typeface="Amiri" pitchFamily="2" charset="-78"/>
               </a:rPr>
               <a:t>تُعَدُّ السِّيَاحَةُ سِلَاحًا ذَا حَدَّيْنِ. فَهِيَ تُسْهِمُ فِي الاقْتِصَادِ وَتُوَفِّرُ فُرَصَ عَمَلٍ، غَيْرَ أَنَّهَا قَدْ تُلْحِقُ الضَّرَرَ بِالتُّرَاثِ إِذَا لَمْ تُنَظَّمْ. يَقُولُ كَاتِبُ المَقَالِ: «إِذَا احْتَرَمَ السُّيَّاحُ القَوَاعِدَ، سَتَبْقَى المَوَاقِعُ لِلْأَجْيَالِ.» ثُمَّ يُضِيفُ: «لَوِ اهْتَمَّتِ الحُكُومَاتُ بِالتَّنْظِيمِ مُنْذُ البِدَايَةِ، لَمَا تَدَهْوَرَتْ مَوَاقِعُ كَثِيرَةٌ.» وَيُسْتَحْسَنُ أَنْ يَتَعَلَّمَ الزَّائِرُ عَادَاتِ البَلَدِ قَبْلَ وُصُولِهِ. وَكَانَ الكَاتِبُ قَدْ زَارَ البَتْرَاءَ، وَأَشَارَ إِلَى أَنَّ التَّنْظِيمَ الجَيِّدَ يَحْمِي جَمَالَهَا. وَالغَرَضُ مِنَ النَّصِّ إِقْنَاعُ القَارِئِ بِالسِّيَاحَةِ المَسْؤُولَةِ.</a:t>
@@ -22704,6 +22799,7 @@
                   <a:srgbClr val="D4AF37"/>
                 </a:solidFill>
                 <a:latin typeface="Amiri" pitchFamily="2" charset="-78"/>
+                <a:ea typeface="Amiri" pitchFamily="2" charset="-78"/>
                 <a:cs typeface="Amiri" pitchFamily="2" charset="-78"/>
               </a:rPr>
               <a:t>م</a:t>
@@ -23024,6 +23120,7 @@
                   <a:srgbClr val="8A6D1E"/>
                 </a:solidFill>
                 <a:latin typeface="Amiri" pitchFamily="2" charset="-78"/>
+                <a:ea typeface="Amiri" pitchFamily="2" charset="-78"/>
                 <a:cs typeface="Amiri" pitchFamily="2" charset="-78"/>
               </a:rPr>
               <a:t>أَسْئِلَةُ القِرَاءَةِ</a:t>
@@ -24612,6 +24709,7 @@
                   <a:srgbClr val="1F2A37"/>
                 </a:solidFill>
                 <a:latin typeface="Amiri" pitchFamily="2" charset="-78"/>
+                <a:ea typeface="Amiri" pitchFamily="2" charset="-78"/>
                 <a:cs typeface="Amiri" pitchFamily="2" charset="-78"/>
               </a:rPr>
               <a:t>لَوِ اهْتَمَّتِ الحُكُومَاتُ … لَمَا تَدَهْوَرَتْ</a:t>
@@ -24713,6 +24811,7 @@
                   <a:srgbClr val="1F2A37"/>
                 </a:solidFill>
                 <a:latin typeface="Amiri" pitchFamily="2" charset="-78"/>
+                <a:ea typeface="Amiri" pitchFamily="2" charset="-78"/>
                 <a:cs typeface="Amiri" pitchFamily="2" charset="-78"/>
               </a:rPr>
               <a:t>كَانَ الكَاتِبُ قَدْ زَارَ البَتْرَاءَ</a:t>
@@ -24814,6 +24913,7 @@
                   <a:srgbClr val="1F2A37"/>
                 </a:solidFill>
                 <a:latin typeface="Amiri" pitchFamily="2" charset="-78"/>
+                <a:ea typeface="Amiri" pitchFamily="2" charset="-78"/>
                 <a:cs typeface="Amiri" pitchFamily="2" charset="-78"/>
               </a:rPr>
               <a:t>إِذَا احْتَرَمَ السُّيَّاحُ القَوَاعِدَ، سَتَبْقَى المَوَاقِعُ لِلْأَجْيَالِ</a:t>
@@ -25050,6 +25150,7 @@
                   <a:srgbClr val="1F2A37"/>
                 </a:solidFill>
                 <a:latin typeface="Amiri" pitchFamily="2" charset="-78"/>
+                <a:ea typeface="Amiri" pitchFamily="2" charset="-78"/>
                 <a:cs typeface="Amiri" pitchFamily="2" charset="-78"/>
               </a:rPr>
               <a:t>إِذَا احْتَرَمَ السُّيَّاحُ القَوَاعِدَ، سَتَبْقَى المَوَاقِعُ</a:t>
@@ -25151,6 +25252,7 @@
                   <a:srgbClr val="1F2A37"/>
                 </a:solidFill>
                 <a:latin typeface="Amiri" pitchFamily="2" charset="-78"/>
+                <a:ea typeface="Amiri" pitchFamily="2" charset="-78"/>
                 <a:cs typeface="Amiri" pitchFamily="2" charset="-78"/>
               </a:rPr>
               <a:t>يُسْتَحْسَنُ أَنْ يَتَعَلَّمَ الزَّائِرُ</a:t>
@@ -25252,6 +25354,7 @@
                   <a:srgbClr val="1F2A37"/>
                 </a:solidFill>
                 <a:latin typeface="Amiri" pitchFamily="2" charset="-78"/>
+                <a:ea typeface="Amiri" pitchFamily="2" charset="-78"/>
                 <a:cs typeface="Amiri" pitchFamily="2" charset="-78"/>
               </a:rPr>
               <a:t>لَوِ اهْتَمَّتِ الحُكُومَاتُ بِالتَّنْظِيمِ مُنْذُ البِدَايَةِ، لَمَا تَدَهْوَرَتْ مَوَاقِعُ كَثِيرَةٌ</a:t>
@@ -25385,6 +25488,7 @@
                   <a:srgbClr val="D4AF37"/>
                 </a:solidFill>
                 <a:latin typeface="Amiri" pitchFamily="2" charset="-78"/>
+                <a:ea typeface="Amiri" pitchFamily="2" charset="-78"/>
                 <a:cs typeface="Amiri" pitchFamily="2" charset="-78"/>
               </a:rPr>
               <a:t>م</a:t>
@@ -25705,6 +25809,7 @@
                   <a:srgbClr val="8A6D1E"/>
                 </a:solidFill>
                 <a:latin typeface="Amiri" pitchFamily="2" charset="-78"/>
+                <a:ea typeface="Amiri" pitchFamily="2" charset="-78"/>
                 <a:cs typeface="Amiri" pitchFamily="2" charset="-78"/>
               </a:rPr>
               <a:t>الإِجَابَاتُ</a:t>
@@ -26246,6 +26351,7 @@
                   <a:srgbClr val="8A6D1E"/>
                 </a:solidFill>
                 <a:latin typeface="Amiri" pitchFamily="2" charset="-78"/>
+                <a:ea typeface="Amiri" pitchFamily="2" charset="-78"/>
                 <a:cs typeface="Amiri" pitchFamily="2" charset="-78"/>
               </a:rPr>
               <a:t>تُعَدُّ السِّيَاحَةُ سِلَاحًا ذَا حَدَّيْنِ.</a:t>
@@ -26749,6 +26855,7 @@
                   <a:srgbClr val="8A6D1E"/>
                 </a:solidFill>
                 <a:latin typeface="Amiri" pitchFamily="2" charset="-78"/>
+                <a:ea typeface="Amiri" pitchFamily="2" charset="-78"/>
                 <a:cs typeface="Amiri" pitchFamily="2" charset="-78"/>
               </a:rPr>
               <a:t>تُسْهِمُ فِي الاقْتِصَادِ وَتُوَفِّرُ فُرَصَ عَمَلٍ.</a:t>
@@ -27252,6 +27359,7 @@
                   <a:srgbClr val="8A6D1E"/>
                 </a:solidFill>
                 <a:latin typeface="Amiri" pitchFamily="2" charset="-78"/>
+                <a:ea typeface="Amiri" pitchFamily="2" charset="-78"/>
                 <a:cs typeface="Amiri" pitchFamily="2" charset="-78"/>
               </a:rPr>
               <a:t>يُسْتَحْسَنُ أَنْ يَتَعَلَّمَ الزَّائِرُ عَادَاتِ البَلَدِ قَبْلَ وُصُولِهِ.</a:t>
@@ -27488,6 +27596,7 @@
                   <a:srgbClr val="9AA1AB"/>
                 </a:solidFill>
                 <a:latin typeface="Amiri" pitchFamily="2" charset="-78"/>
+                <a:ea typeface="Amiri" pitchFamily="2" charset="-78"/>
                 <a:cs typeface="Amiri" pitchFamily="2" charset="-78"/>
               </a:rPr>
               <a:t>لَوِ اهْتَمَّتِ الحُكُومَاتُ … لَمَا تَدَهْوَرَتْ</a:t>
@@ -27589,6 +27698,7 @@
                   <a:srgbClr val="9AA1AB"/>
                 </a:solidFill>
                 <a:latin typeface="Amiri" pitchFamily="2" charset="-78"/>
+                <a:ea typeface="Amiri" pitchFamily="2" charset="-78"/>
                 <a:cs typeface="Amiri" pitchFamily="2" charset="-78"/>
               </a:rPr>
               <a:t>كَانَ الكَاتِبُ قَدْ زَارَ البَتْرَاءَ</a:t>
@@ -27717,6 +27827,7 @@
                   <a:srgbClr val="1F2A37"/>
                 </a:solidFill>
                 <a:latin typeface="Amiri" pitchFamily="2" charset="-78"/>
+                <a:ea typeface="Amiri" pitchFamily="2" charset="-78"/>
                 <a:cs typeface="Amiri" pitchFamily="2" charset="-78"/>
               </a:rPr>
               <a:t>إِذَا احْتَرَمَ السُّيَّاحُ القَوَاعِدَ، سَتَبْقَى المَوَاقِعُ لِلْأَجْيَالِ</a:t>
@@ -27755,6 +27866,7 @@
                   <a:srgbClr val="8A6D1E"/>
                 </a:solidFill>
                 <a:latin typeface="Amiri" pitchFamily="2" charset="-78"/>
+                <a:ea typeface="Amiri" pitchFamily="2" charset="-78"/>
                 <a:cs typeface="Amiri" pitchFamily="2" charset="-78"/>
               </a:rPr>
               <a:t>إِذَا … سَـ</a:t>
@@ -28004,6 +28116,7 @@
                   <a:srgbClr val="9AA1AB"/>
                 </a:solidFill>
                 <a:latin typeface="Amiri" pitchFamily="2" charset="-78"/>
+                <a:ea typeface="Amiri" pitchFamily="2" charset="-78"/>
                 <a:cs typeface="Amiri" pitchFamily="2" charset="-78"/>
               </a:rPr>
               <a:t>إِذَا احْتَرَمَ السُّيَّاحُ القَوَاعِدَ، سَتَبْقَى المَوَاقِعُ</a:t>
@@ -28105,6 +28218,7 @@
                   <a:srgbClr val="9AA1AB"/>
                 </a:solidFill>
                 <a:latin typeface="Amiri" pitchFamily="2" charset="-78"/>
+                <a:ea typeface="Amiri" pitchFamily="2" charset="-78"/>
                 <a:cs typeface="Amiri" pitchFamily="2" charset="-78"/>
               </a:rPr>
               <a:t>يُسْتَحْسَنُ أَنْ يَتَعَلَّمَ الزَّائِرُ</a:t>
@@ -28233,6 +28347,7 @@
                   <a:srgbClr val="1F2A37"/>
                 </a:solidFill>
                 <a:latin typeface="Amiri" pitchFamily="2" charset="-78"/>
+                <a:ea typeface="Amiri" pitchFamily="2" charset="-78"/>
                 <a:cs typeface="Amiri" pitchFamily="2" charset="-78"/>
               </a:rPr>
               <a:t>لَوِ اهْتَمَّتِ الحُكُومَاتُ بِالتَّنْظِيمِ مُنْذُ البِدَايَةِ، لَمَا تَدَهْوَرَتْ مَوَاقِعُ كَثِيرَةٌ</a:t>
@@ -28271,6 +28386,7 @@
                   <a:srgbClr val="8A6D1E"/>
                 </a:solidFill>
                 <a:latin typeface="Amiri" pitchFamily="2" charset="-78"/>
+                <a:ea typeface="Amiri" pitchFamily="2" charset="-78"/>
                 <a:cs typeface="Amiri" pitchFamily="2" charset="-78"/>
               </a:rPr>
               <a:t>لَوْ … لَـ</a:t>
@@ -28417,6 +28533,7 @@
                   <a:srgbClr val="D4AF37"/>
                 </a:solidFill>
                 <a:latin typeface="Amiri" pitchFamily="2" charset="-78"/>
+                <a:ea typeface="Amiri" pitchFamily="2" charset="-78"/>
                 <a:cs typeface="Amiri" pitchFamily="2" charset="-78"/>
               </a:rPr>
               <a:t>م</a:t>
@@ -28737,6 +28854,7 @@
                   <a:srgbClr val="8A6D1E"/>
                 </a:solidFill>
                 <a:latin typeface="Amiri" pitchFamily="2" charset="-78"/>
+                <a:ea typeface="Amiri" pitchFamily="2" charset="-78"/>
                 <a:cs typeface="Amiri" pitchFamily="2" charset="-78"/>
               </a:rPr>
               <a:t>أَسْئِلَةُ القِرَاءَةِ</a:t>
@@ -29449,6 +29567,7 @@
                   <a:srgbClr val="1F2A37"/>
                 </a:solidFill>
                 <a:latin typeface="Amiri" pitchFamily="2" charset="-78"/>
+                <a:ea typeface="Amiri" pitchFamily="2" charset="-78"/>
                 <a:cs typeface="Amiri" pitchFamily="2" charset="-78"/>
               </a:rPr>
               <a:t>كَانَ الكَاتِبُ قَدْ زَارَ البَتْرَاءَ</a:t>
@@ -29550,6 +29669,7 @@
                   <a:srgbClr val="1F2A37"/>
                 </a:solidFill>
                 <a:latin typeface="Amiri" pitchFamily="2" charset="-78"/>
+                <a:ea typeface="Amiri" pitchFamily="2" charset="-78"/>
                 <a:cs typeface="Amiri" pitchFamily="2" charset="-78"/>
               </a:rPr>
               <a:t>إِذَا احْتَرَمَ السُّيَّاحُ</a:t>
@@ -29651,6 +29771,7 @@
                   <a:srgbClr val="1F2A37"/>
                 </a:solidFill>
                 <a:latin typeface="Amiri" pitchFamily="2" charset="-78"/>
+                <a:ea typeface="Amiri" pitchFamily="2" charset="-78"/>
                 <a:cs typeface="Amiri" pitchFamily="2" charset="-78"/>
               </a:rPr>
               <a:t>يُسْتَحْسَنُ أَنْ يَتَعَلَّمَ</a:t>
@@ -29799,6 +29920,7 @@
                   <a:srgbClr val="1B3B6F"/>
                 </a:solidFill>
                 <a:latin typeface="Amiri" pitchFamily="2" charset="-78"/>
+                <a:ea typeface="Amiri" pitchFamily="2" charset="-78"/>
                 <a:cs typeface="Amiri" pitchFamily="2" charset="-78"/>
               </a:rPr>
               <a:t>إِذَا احْتَرَمَ السُّيَّاحُ القَوَاعِدَ،</a:t>
@@ -29825,6 +29947,7 @@
                   <a:srgbClr val="1B3B6F"/>
                 </a:solidFill>
                 <a:latin typeface="Amiri" pitchFamily="2" charset="-78"/>
+                <a:ea typeface="Amiri" pitchFamily="2" charset="-78"/>
                 <a:cs typeface="Amiri" pitchFamily="2" charset="-78"/>
               </a:rPr>
               <a:t>المَوَاقِعُ</a:t>
@@ -29939,6 +30062,7 @@
                   <a:srgbClr val="1F2A37"/>
                 </a:solidFill>
                 <a:latin typeface="Amiri" pitchFamily="2" charset="-78"/>
+                <a:ea typeface="Amiri" pitchFamily="2" charset="-78"/>
                 <a:cs typeface="Amiri" pitchFamily="2" charset="-78"/>
               </a:rPr>
               <a:t>لَبَقِيَتِ</a:t>
@@ -30040,6 +30164,7 @@
                   <a:srgbClr val="1F2A37"/>
                 </a:solidFill>
                 <a:latin typeface="Amiri" pitchFamily="2" charset="-78"/>
+                <a:ea typeface="Amiri" pitchFamily="2" charset="-78"/>
                 <a:cs typeface="Amiri" pitchFamily="2" charset="-78"/>
               </a:rPr>
               <a:t>بَقِيَتِ</a:t>
@@ -30141,6 +30266,7 @@
                   <a:srgbClr val="1F2A37"/>
                 </a:solidFill>
                 <a:latin typeface="Amiri" pitchFamily="2" charset="-78"/>
+                <a:ea typeface="Amiri" pitchFamily="2" charset="-78"/>
                 <a:cs typeface="Amiri" pitchFamily="2" charset="-78"/>
               </a:rPr>
               <a:t>سَتَبْقَى</a:t>
@@ -30289,6 +30415,7 @@
                   <a:srgbClr val="1B3B6F"/>
                 </a:solidFill>
                 <a:latin typeface="Amiri" pitchFamily="2" charset="-78"/>
+                <a:ea typeface="Amiri" pitchFamily="2" charset="-78"/>
                 <a:cs typeface="Amiri" pitchFamily="2" charset="-78"/>
               </a:rPr>
               <a:t>لَوِ اهْتَمَّتِ الحُكُومَاتُ مُبَكِّرًا،</a:t>
@@ -30315,6 +30442,7 @@
                   <a:srgbClr val="1B3B6F"/>
                 </a:solidFill>
                 <a:latin typeface="Amiri" pitchFamily="2" charset="-78"/>
+                <a:ea typeface="Amiri" pitchFamily="2" charset="-78"/>
                 <a:cs typeface="Amiri" pitchFamily="2" charset="-78"/>
               </a:rPr>
               <a:t>المَوَاقِعُ</a:t>
@@ -30429,6 +30557,7 @@
                   <a:srgbClr val="1F2A37"/>
                 </a:solidFill>
                 <a:latin typeface="Amiri" pitchFamily="2" charset="-78"/>
+                <a:ea typeface="Amiri" pitchFamily="2" charset="-78"/>
                 <a:cs typeface="Amiri" pitchFamily="2" charset="-78"/>
               </a:rPr>
               <a:t>سَتَتَدَهْوَرُ</a:t>
@@ -30530,6 +30659,7 @@
                   <a:srgbClr val="1F2A37"/>
                 </a:solidFill>
                 <a:latin typeface="Amiri" pitchFamily="2" charset="-78"/>
+                <a:ea typeface="Amiri" pitchFamily="2" charset="-78"/>
                 <a:cs typeface="Amiri" pitchFamily="2" charset="-78"/>
               </a:rPr>
               <a:t>تَتَدَهْوَرُ</a:t>
@@ -30631,6 +30761,7 @@
                   <a:srgbClr val="1F2A37"/>
                 </a:solidFill>
                 <a:latin typeface="Amiri" pitchFamily="2" charset="-78"/>
+                <a:ea typeface="Amiri" pitchFamily="2" charset="-78"/>
                 <a:cs typeface="Amiri" pitchFamily="2" charset="-78"/>
               </a:rPr>
               <a:t>لَمَا تَدَهْوَرَتِ</a:t>
@@ -31202,6 +31333,7 @@
                   <a:srgbClr val="D4AF37"/>
                 </a:solidFill>
                 <a:latin typeface="Amiri" pitchFamily="2" charset="-78"/>
+                <a:ea typeface="Amiri" pitchFamily="2" charset="-78"/>
                 <a:cs typeface="Amiri" pitchFamily="2" charset="-78"/>
               </a:rPr>
               <a:t>م</a:t>
@@ -31522,6 +31654,7 @@
                   <a:srgbClr val="8A6D1E"/>
                 </a:solidFill>
                 <a:latin typeface="Amiri" pitchFamily="2" charset="-78"/>
+                <a:ea typeface="Amiri" pitchFamily="2" charset="-78"/>
                 <a:cs typeface="Amiri" pitchFamily="2" charset="-78"/>
               </a:rPr>
               <a:t>آدَابُ الصَّفِّ</a:t>
@@ -33053,6 +33186,7 @@
                   <a:srgbClr val="D4AF37"/>
                 </a:solidFill>
                 <a:latin typeface="Amiri" pitchFamily="2" charset="-78"/>
+                <a:ea typeface="Amiri" pitchFamily="2" charset="-78"/>
                 <a:cs typeface="Amiri" pitchFamily="2" charset="-78"/>
               </a:rPr>
               <a:t>م</a:t>
@@ -33373,6 +33507,7 @@
                   <a:srgbClr val="8A6D1E"/>
                 </a:solidFill>
                 <a:latin typeface="Amiri" pitchFamily="2" charset="-78"/>
+                <a:ea typeface="Amiri" pitchFamily="2" charset="-78"/>
                 <a:cs typeface="Amiri" pitchFamily="2" charset="-78"/>
               </a:rPr>
               <a:t>الإِجَابَاتُ</a:t>
@@ -34177,6 +34312,7 @@
                   <a:srgbClr val="1F2A37"/>
                 </a:solidFill>
                 <a:latin typeface="Amiri" pitchFamily="2" charset="-78"/>
+                <a:ea typeface="Amiri" pitchFamily="2" charset="-78"/>
                 <a:cs typeface="Amiri" pitchFamily="2" charset="-78"/>
               </a:rPr>
               <a:t>كَانَ الكَاتِبُ قَدْ زَارَ البَتْرَاءَ</a:t>
@@ -34278,6 +34414,7 @@
                   <a:srgbClr val="9AA1AB"/>
                 </a:solidFill>
                 <a:latin typeface="Amiri" pitchFamily="2" charset="-78"/>
+                <a:ea typeface="Amiri" pitchFamily="2" charset="-78"/>
                 <a:cs typeface="Amiri" pitchFamily="2" charset="-78"/>
               </a:rPr>
               <a:t>إِذَا احْتَرَمَ السُّيَّاحُ</a:t>
@@ -34379,6 +34516,7 @@
                   <a:srgbClr val="9AA1AB"/>
                 </a:solidFill>
                 <a:latin typeface="Amiri" pitchFamily="2" charset="-78"/>
+                <a:ea typeface="Amiri" pitchFamily="2" charset="-78"/>
                 <a:cs typeface="Amiri" pitchFamily="2" charset="-78"/>
               </a:rPr>
               <a:t>يُسْتَحْسَنُ أَنْ يَتَعَلَّمَ</a:t>
@@ -34417,6 +34555,7 @@
                   <a:srgbClr val="8A6D1E"/>
                 </a:solidFill>
                 <a:latin typeface="Amiri" pitchFamily="2" charset="-78"/>
+                <a:ea typeface="Amiri" pitchFamily="2" charset="-78"/>
                 <a:cs typeface="Amiri" pitchFamily="2" charset="-78"/>
               </a:rPr>
               <a:t>كَانَ … قَدْ</a:t>
@@ -34578,6 +34717,7 @@
                   <a:srgbClr val="1B3B6F"/>
                 </a:solidFill>
                 <a:latin typeface="Amiri" pitchFamily="2" charset="-78"/>
+                <a:ea typeface="Amiri" pitchFamily="2" charset="-78"/>
                 <a:cs typeface="Amiri" pitchFamily="2" charset="-78"/>
               </a:rPr>
               <a:t>إِذَا احْتَرَمَ السُّيَّاحُ القَوَاعِدَ،</a:t>
@@ -34604,6 +34744,7 @@
                   <a:srgbClr val="1B3B6F"/>
                 </a:solidFill>
                 <a:latin typeface="Amiri" pitchFamily="2" charset="-78"/>
+                <a:ea typeface="Amiri" pitchFamily="2" charset="-78"/>
                 <a:cs typeface="Amiri" pitchFamily="2" charset="-78"/>
               </a:rPr>
               <a:t>المَوَاقِعُ</a:t>
@@ -34718,6 +34859,7 @@
                   <a:srgbClr val="9AA1AB"/>
                 </a:solidFill>
                 <a:latin typeface="Amiri" pitchFamily="2" charset="-78"/>
+                <a:ea typeface="Amiri" pitchFamily="2" charset="-78"/>
                 <a:cs typeface="Amiri" pitchFamily="2" charset="-78"/>
               </a:rPr>
               <a:t>لَبَقِيَتِ</a:t>
@@ -34819,6 +34961,7 @@
                   <a:srgbClr val="9AA1AB"/>
                 </a:solidFill>
                 <a:latin typeface="Amiri" pitchFamily="2" charset="-78"/>
+                <a:ea typeface="Amiri" pitchFamily="2" charset="-78"/>
                 <a:cs typeface="Amiri" pitchFamily="2" charset="-78"/>
               </a:rPr>
               <a:t>بَقِيَتِ</a:t>
@@ -34947,6 +35090,7 @@
                   <a:srgbClr val="1F2A37"/>
                 </a:solidFill>
                 <a:latin typeface="Amiri" pitchFamily="2" charset="-78"/>
+                <a:ea typeface="Amiri" pitchFamily="2" charset="-78"/>
                 <a:cs typeface="Amiri" pitchFamily="2" charset="-78"/>
               </a:rPr>
               <a:t>سَتَبْقَى</a:t>
@@ -34998,6 +35142,7 @@
                   <a:srgbClr val="8A6D1E"/>
                 </a:solidFill>
                 <a:latin typeface="Amiri" pitchFamily="2" charset="-78"/>
+                <a:ea typeface="Amiri" pitchFamily="2" charset="-78"/>
                 <a:cs typeface="Amiri" pitchFamily="2" charset="-78"/>
               </a:rPr>
               <a:t>إِذَا</a:t>
@@ -35024,6 +35169,7 @@
                   <a:srgbClr val="8A6D1E"/>
                 </a:solidFill>
                 <a:latin typeface="Amiri" pitchFamily="2" charset="-78"/>
+                <a:ea typeface="Amiri" pitchFamily="2" charset="-78"/>
                 <a:cs typeface="Amiri" pitchFamily="2" charset="-78"/>
               </a:rPr>
               <a:t>سَـ</a:t>
@@ -35185,6 +35331,7 @@
                   <a:srgbClr val="1B3B6F"/>
                 </a:solidFill>
                 <a:latin typeface="Amiri" pitchFamily="2" charset="-78"/>
+                <a:ea typeface="Amiri" pitchFamily="2" charset="-78"/>
                 <a:cs typeface="Amiri" pitchFamily="2" charset="-78"/>
               </a:rPr>
               <a:t>لَوِ اهْتَمَّتِ الحُكُومَاتُ مُبَكِّرًا،</a:t>
@@ -35211,6 +35358,7 @@
                   <a:srgbClr val="1B3B6F"/>
                 </a:solidFill>
                 <a:latin typeface="Amiri" pitchFamily="2" charset="-78"/>
+                <a:ea typeface="Amiri" pitchFamily="2" charset="-78"/>
                 <a:cs typeface="Amiri" pitchFamily="2" charset="-78"/>
               </a:rPr>
               <a:t>المَوَاقِعُ</a:t>
@@ -35325,6 +35473,7 @@
                   <a:srgbClr val="9AA1AB"/>
                 </a:solidFill>
                 <a:latin typeface="Amiri" pitchFamily="2" charset="-78"/>
+                <a:ea typeface="Amiri" pitchFamily="2" charset="-78"/>
                 <a:cs typeface="Amiri" pitchFamily="2" charset="-78"/>
               </a:rPr>
               <a:t>سَتَتَدَهْوَرُ</a:t>
@@ -35426,6 +35575,7 @@
                   <a:srgbClr val="9AA1AB"/>
                 </a:solidFill>
                 <a:latin typeface="Amiri" pitchFamily="2" charset="-78"/>
+                <a:ea typeface="Amiri" pitchFamily="2" charset="-78"/>
                 <a:cs typeface="Amiri" pitchFamily="2" charset="-78"/>
               </a:rPr>
               <a:t>تَتَدَهْوَرُ</a:t>
@@ -35554,6 +35704,7 @@
                   <a:srgbClr val="1F2A37"/>
                 </a:solidFill>
                 <a:latin typeface="Amiri" pitchFamily="2" charset="-78"/>
+                <a:ea typeface="Amiri" pitchFamily="2" charset="-78"/>
                 <a:cs typeface="Amiri" pitchFamily="2" charset="-78"/>
               </a:rPr>
               <a:t>لَمَا تَدَهْوَرَتِ</a:t>
@@ -35605,6 +35756,7 @@
                   <a:srgbClr val="8A6D1E"/>
                 </a:solidFill>
                 <a:latin typeface="Amiri" pitchFamily="2" charset="-78"/>
+                <a:ea typeface="Amiri" pitchFamily="2" charset="-78"/>
                 <a:cs typeface="Amiri" pitchFamily="2" charset="-78"/>
               </a:rPr>
               <a:t>لَوْ</a:t>
@@ -35631,6 +35783,7 @@
                   <a:srgbClr val="8A6D1E"/>
                 </a:solidFill>
                 <a:latin typeface="Amiri" pitchFamily="2" charset="-78"/>
+                <a:ea typeface="Amiri" pitchFamily="2" charset="-78"/>
                 <a:cs typeface="Amiri" pitchFamily="2" charset="-78"/>
               </a:rPr>
               <a:t>لَـ</a:t>
@@ -35657,6 +35810,7 @@
                   <a:srgbClr val="8A6D1E"/>
                 </a:solidFill>
                 <a:latin typeface="Amiri" pitchFamily="2" charset="-78"/>
+                <a:ea typeface="Amiri" pitchFamily="2" charset="-78"/>
                 <a:cs typeface="Amiri" pitchFamily="2" charset="-78"/>
               </a:rPr>
               <a:t>لَمَا</a:t>
@@ -36173,6 +36327,7 @@
                   <a:srgbClr val="8A6D1E"/>
                 </a:solidFill>
                 <a:latin typeface="Amiri" pitchFamily="2" charset="-78"/>
+                <a:ea typeface="Amiri" pitchFamily="2" charset="-78"/>
                 <a:cs typeface="Amiri" pitchFamily="2" charset="-78"/>
               </a:rPr>
               <a:t>الغَرَضُ مِنَ النَّصِّ إِقْنَاعُ القَارِئِ بِالسِّيَاحَةِ المَسْؤُولَةِ.</a:t>
@@ -36306,6 +36461,7 @@
                   <a:srgbClr val="D4AF37"/>
                 </a:solidFill>
                 <a:latin typeface="Amiri" pitchFamily="2" charset="-78"/>
+                <a:ea typeface="Amiri" pitchFamily="2" charset="-78"/>
                 <a:cs typeface="Amiri" pitchFamily="2" charset="-78"/>
               </a:rPr>
               <a:t>م</a:t>
@@ -36626,6 +36782,7 @@
                   <a:srgbClr val="8A6D1E"/>
                 </a:solidFill>
                 <a:latin typeface="Amiri" pitchFamily="2" charset="-78"/>
+                <a:ea typeface="Amiri" pitchFamily="2" charset="-78"/>
                 <a:cs typeface="Amiri" pitchFamily="2" charset="-78"/>
               </a:rPr>
               <a:t>اسْتِمَارَةُ السَّفَرِ</a:t>
@@ -36906,6 +37063,7 @@
                   <a:srgbClr val="1B3B6F"/>
                 </a:solidFill>
                 <a:latin typeface="Amiri" pitchFamily="2" charset="-78"/>
+                <a:ea typeface="Amiri" pitchFamily="2" charset="-78"/>
                 <a:cs typeface="Amiri" pitchFamily="2" charset="-78"/>
               </a:rPr>
               <a:t>الوِجْهَةُ وَمَكَانُ الإِقَامَةِ بِاسْتِعْمَالِ «يُقِيمُ فِي»</a:t>
@@ -37112,6 +37270,7 @@
                   <a:srgbClr val="1B3B6F"/>
                 </a:solidFill>
                 <a:latin typeface="Amiri" pitchFamily="2" charset="-78"/>
+                <a:ea typeface="Amiri" pitchFamily="2" charset="-78"/>
                 <a:cs typeface="Amiri" pitchFamily="2" charset="-78"/>
               </a:rPr>
               <a:t>طَرِيقَةُ الحَجْزِ بِاسْتِعْمَالِ «يَحْجِزُ»</a:t>
@@ -37318,6 +37477,7 @@
                   <a:srgbClr val="1B3B6F"/>
                 </a:solidFill>
                 <a:latin typeface="Amiri" pitchFamily="2" charset="-78"/>
+                <a:ea typeface="Amiri" pitchFamily="2" charset="-78"/>
                 <a:cs typeface="Amiri" pitchFamily="2" charset="-78"/>
               </a:rPr>
               <a:t>إِنْجَازٌ سَابِقٌ عَنِ التَّحْضِيرِ بِاسْتِعْمَالِ «كُنْتُ قَدْ …»</a:t>
@@ -37524,6 +37684,7 @@
                   <a:srgbClr val="1B3B6F"/>
                 </a:solidFill>
                 <a:latin typeface="Amiri" pitchFamily="2" charset="-78"/>
+                <a:ea typeface="Amiri" pitchFamily="2" charset="-78"/>
                 <a:cs typeface="Amiri" pitchFamily="2" charset="-78"/>
               </a:rPr>
               <a:t>خُطَّةٌ شَرْطِيَّةٌ مِنَ النَّوْعِ الأَوَّلِ</a:t>
@@ -37730,6 +37891,7 @@
                   <a:srgbClr val="1B3B6F"/>
                 </a:solidFill>
                 <a:latin typeface="Amiri" pitchFamily="2" charset="-78"/>
+                <a:ea typeface="Amiri" pitchFamily="2" charset="-78"/>
                 <a:cs typeface="Amiri" pitchFamily="2" charset="-78"/>
               </a:rPr>
               <a:t>تَأَمُّلٌ شَرْطِيٌّ مِنَ النَّوْعِ الثَّانِي عَنْ رِحْلَةٍ سَابِقَةٍ</a:t>
@@ -37884,6 +38046,7 @@
                   <a:srgbClr val="1B3B6F"/>
                 </a:solidFill>
                 <a:latin typeface="Amiri" pitchFamily="2" charset="-78"/>
+                <a:ea typeface="Amiri" pitchFamily="2" charset="-78"/>
                 <a:cs typeface="Amiri" pitchFamily="2" charset="-78"/>
               </a:rPr>
               <a:t>سَأُقِيمُ فِي رِيَاضٍ فِي فَاسَ</a:t>
@@ -37910,6 +38073,7 @@
                   <a:srgbClr val="1B3B6F"/>
                 </a:solidFill>
                 <a:latin typeface="Amiri" pitchFamily="2" charset="-78"/>
+                <a:ea typeface="Amiri" pitchFamily="2" charset="-78"/>
                 <a:cs typeface="Amiri" pitchFamily="2" charset="-78"/>
               </a:rPr>
               <a:t>حَجَزْتُ عَبْرَ الإِنْتَرْنِتْ</a:t>
@@ -37936,6 +38100,7 @@
                   <a:srgbClr val="1B3B6F"/>
                 </a:solidFill>
                 <a:latin typeface="Amiri" pitchFamily="2" charset="-78"/>
+                <a:ea typeface="Amiri" pitchFamily="2" charset="-78"/>
                 <a:cs typeface="Amiri" pitchFamily="2" charset="-78"/>
               </a:rPr>
               <a:t>كُنْتُ قَدْ قَرَأْتُ عَنِ المَدِينَةِ</a:t>
@@ -37962,6 +38127,7 @@
                   <a:srgbClr val="1B3B6F"/>
                 </a:solidFill>
                 <a:latin typeface="Amiri" pitchFamily="2" charset="-78"/>
+                <a:ea typeface="Amiri" pitchFamily="2" charset="-78"/>
                 <a:cs typeface="Amiri" pitchFamily="2" charset="-78"/>
               </a:rPr>
               <a:t>إِذَا زُرْتُهَا، سَأَبْقَى أُسْبُوعًا</a:t>
@@ -37988,6 +38154,7 @@
                   <a:srgbClr val="1B3B6F"/>
                 </a:solidFill>
                 <a:latin typeface="Amiri" pitchFamily="2" charset="-78"/>
+                <a:ea typeface="Amiri" pitchFamily="2" charset="-78"/>
                 <a:cs typeface="Amiri" pitchFamily="2" charset="-78"/>
               </a:rPr>
               <a:t>لَوْ بَقِيتُ أَطْوَلَ، لَرَأَيْتُ المَزِيدَ</a:t>
@@ -38121,6 +38288,7 @@
                   <a:srgbClr val="D4AF37"/>
                 </a:solidFill>
                 <a:latin typeface="Amiri" pitchFamily="2" charset="-78"/>
+                <a:ea typeface="Amiri" pitchFamily="2" charset="-78"/>
                 <a:cs typeface="Amiri" pitchFamily="2" charset="-78"/>
               </a:rPr>
               <a:t>م</a:t>
@@ -38441,6 +38609,7 @@
                   <a:srgbClr val="8A6D1E"/>
                 </a:solidFill>
                 <a:latin typeface="Amiri" pitchFamily="2" charset="-78"/>
+                <a:ea typeface="Amiri" pitchFamily="2" charset="-78"/>
                 <a:cs typeface="Amiri" pitchFamily="2" charset="-78"/>
               </a:rPr>
               <a:t>مَقَالَةُ سَفَرٍ</a:t>
@@ -39255,6 +39424,7 @@
                   <a:srgbClr val="D4AF37"/>
                 </a:solidFill>
                 <a:latin typeface="Amiri" pitchFamily="2" charset="-78"/>
+                <a:ea typeface="Amiri" pitchFamily="2" charset="-78"/>
                 <a:cs typeface="Amiri" pitchFamily="2" charset="-78"/>
               </a:rPr>
               <a:t>م</a:t>
@@ -39575,6 +39745,7 @@
                   <a:srgbClr val="8A6D1E"/>
                 </a:solidFill>
                 <a:latin typeface="Amiri" pitchFamily="2" charset="-78"/>
+                <a:ea typeface="Amiri" pitchFamily="2" charset="-78"/>
                 <a:cs typeface="Amiri" pitchFamily="2" charset="-78"/>
               </a:rPr>
               <a:t>فِي وَكَالَةِ السَّفَرِ</a:t>
@@ -39817,6 +39988,7 @@
                   <a:srgbClr val="1B3B6F"/>
                 </a:solidFill>
                 <a:latin typeface="Amiri" pitchFamily="2" charset="-78"/>
+                <a:ea typeface="Amiri" pitchFamily="2" charset="-78"/>
                 <a:cs typeface="Amiri" pitchFamily="2" charset="-78"/>
               </a:rPr>
               <a:t>اسْأَلْ عَنْ وِجْهَةٍ سِيَاحِيَّةٍ.</a:t>
@@ -39920,6 +40092,7 @@
                   <a:srgbClr val="1B3B6F"/>
                 </a:solidFill>
                 <a:latin typeface="Amiri" pitchFamily="2" charset="-78"/>
+                <a:ea typeface="Amiri" pitchFamily="2" charset="-78"/>
                 <a:cs typeface="Amiri" pitchFamily="2" charset="-78"/>
               </a:rPr>
               <a:t>اسْأَلْ عَنْ خِيَارَاتِ الحَجْزِ وَالإِقَامَةِ.</a:t>
@@ -40023,6 +40196,7 @@
                   <a:srgbClr val="1B3B6F"/>
                 </a:solidFill>
                 <a:latin typeface="Amiri" pitchFamily="2" charset="-78"/>
+                <a:ea typeface="Amiri" pitchFamily="2" charset="-78"/>
                 <a:cs typeface="Amiri" pitchFamily="2" charset="-78"/>
               </a:rPr>
               <a:t>صِفْ مُشْكِلَةً وَاجَهْتَهَا فِي إِجَازَةٍ سَابِقَةٍ.</a:t>
@@ -40126,6 +40300,7 @@
                   <a:srgbClr val="1B3B6F"/>
                 </a:solidFill>
                 <a:latin typeface="Amiri" pitchFamily="2" charset="-78"/>
+                <a:ea typeface="Amiri" pitchFamily="2" charset="-78"/>
                 <a:cs typeface="Amiri" pitchFamily="2" charset="-78"/>
               </a:rPr>
               <a:t>اطْلُبْ تَوْصِيَةً شَرْطِيَّةً مِنَ الوَكِيلِ.</a:t>
@@ -40297,6 +40472,7 @@
                   <a:srgbClr val="D4AF37"/>
                 </a:solidFill>
                 <a:latin typeface="Amiri" pitchFamily="2" charset="-78"/>
+                <a:ea typeface="Amiri" pitchFamily="2" charset="-78"/>
                 <a:cs typeface="Amiri" pitchFamily="2" charset="-78"/>
               </a:rPr>
               <a:t>م</a:t>
@@ -40617,6 +40793,7 @@
                   <a:srgbClr val="8A6D1E"/>
                 </a:solidFill>
                 <a:latin typeface="Amiri" pitchFamily="2" charset="-78"/>
+                <a:ea typeface="Amiri" pitchFamily="2" charset="-78"/>
                 <a:cs typeface="Amiri" pitchFamily="2" charset="-78"/>
               </a:rPr>
               <a:t>المُحَادَثَةُ</a:t>
@@ -40859,6 +41036,7 @@
                   <a:srgbClr val="1B3B6F"/>
                 </a:solidFill>
                 <a:latin typeface="Amiri" pitchFamily="2" charset="-78"/>
+                <a:ea typeface="Amiri" pitchFamily="2" charset="-78"/>
                 <a:cs typeface="Amiri" pitchFamily="2" charset="-78"/>
               </a:rPr>
               <a:t>صِفْ إِجَازَةً مَاضِيَةً — مَا الَّذِي كُنْتَ قَدْ تَوَقَّعْتَهُ؟</a:t>
@@ -40962,6 +41140,7 @@
                   <a:srgbClr val="1B3B6F"/>
                 </a:solidFill>
                 <a:latin typeface="Amiri" pitchFamily="2" charset="-78"/>
+                <a:ea typeface="Amiri" pitchFamily="2" charset="-78"/>
                 <a:cs typeface="Amiri" pitchFamily="2" charset="-78"/>
               </a:rPr>
               <a:t>مَا رَأْيُكَ فِي السِّيَاحَةِ المُسْتَدَامَةِ؟</a:t>
@@ -41065,6 +41244,7 @@
                   <a:srgbClr val="1B3B6F"/>
                 </a:solidFill>
                 <a:latin typeface="Amiri" pitchFamily="2" charset="-78"/>
+                <a:ea typeface="Amiri" pitchFamily="2" charset="-78"/>
                 <a:cs typeface="Amiri" pitchFamily="2" charset="-78"/>
               </a:rPr>
               <a:t>لَوْ كَانَ لَدَيْكَ مِيزَانِيَّةٌ غَيْرُ مَحْدُودَةٍ لِلسَّفَرِ، أَيْنَ سَتَذْهَبُ؟</a:t>
@@ -41236,6 +41416,7 @@
                   <a:srgbClr val="D4AF37"/>
                 </a:solidFill>
                 <a:latin typeface="Amiri" pitchFamily="2" charset="-78"/>
+                <a:ea typeface="Amiri" pitchFamily="2" charset="-78"/>
                 <a:cs typeface="Amiri" pitchFamily="2" charset="-78"/>
               </a:rPr>
               <a:t>م</a:t>
@@ -41556,6 +41737,7 @@
                   <a:srgbClr val="8A6D1E"/>
                 </a:solidFill>
                 <a:latin typeface="Amiri" pitchFamily="2" charset="-78"/>
+                <a:ea typeface="Amiri" pitchFamily="2" charset="-78"/>
                 <a:cs typeface="Amiri" pitchFamily="2" charset="-78"/>
               </a:rPr>
               <a:t>مِلَفُّ المَهَارَاتِ</a:t>
@@ -42728,6 +42910,7 @@
                   <a:srgbClr val="D4AF37"/>
                 </a:solidFill>
                 <a:latin typeface="Amiri" pitchFamily="2" charset="-78"/>
+                <a:ea typeface="Amiri" pitchFamily="2" charset="-78"/>
                 <a:cs typeface="Amiri" pitchFamily="2" charset="-78"/>
               </a:rPr>
               <a:t>م</a:t>
@@ -43048,6 +43231,7 @@
                   <a:srgbClr val="8A6D1E"/>
                 </a:solidFill>
                 <a:latin typeface="Amiri" pitchFamily="2" charset="-78"/>
+                <a:ea typeface="Amiri" pitchFamily="2" charset="-78"/>
                 <a:cs typeface="Amiri" pitchFamily="2" charset="-78"/>
               </a:rPr>
               <a:t>قَيِّمْ عَمَلَكَ</a:t>
@@ -44205,6 +44389,7 @@
                   <a:srgbClr val="D4AF37"/>
                 </a:solidFill>
                 <a:latin typeface="Amiri" pitchFamily="2" charset="-78"/>
+                <a:ea typeface="Amiri" pitchFamily="2" charset="-78"/>
                 <a:cs typeface="Amiri" pitchFamily="2" charset="-78"/>
               </a:rPr>
               <a:t>م</a:t>
@@ -44525,6 +44710,7 @@
                   <a:srgbClr val="8A6D1E"/>
                 </a:solidFill>
                 <a:latin typeface="Amiri" pitchFamily="2" charset="-78"/>
+                <a:ea typeface="Amiri" pitchFamily="2" charset="-78"/>
                 <a:cs typeface="Amiri" pitchFamily="2" charset="-78"/>
               </a:rPr>
               <a:t>التَّحْضِيرُ لِلدَّرْسِ القَادِمِ</a:t>
@@ -44738,6 +44924,7 @@
                   <a:srgbClr val="1B3B6F"/>
                 </a:solidFill>
                 <a:latin typeface="Amiri" pitchFamily="2" charset="-78"/>
+                <a:ea typeface="Amiri" pitchFamily="2" charset="-78"/>
                 <a:cs typeface="Amiri" pitchFamily="2" charset="-78"/>
               </a:rPr>
               <a:t>نِظَامٌ بِيئِيٌّ</a:t>
@@ -44784,11 +44971,12 @@
               <a:buNone/>
             </a:pPr>
             <a:r>
-              <a:rPr lang="en-US" sz="1000" i="1" dirty="0">
+              <a:rPr lang="ar-SA" sz="1000" i="1" dirty="0">
                 <a:solidFill>
                   <a:srgbClr val="5A6472"/>
                 </a:solidFill>
                 <a:latin typeface="Calibri" pitchFamily="34" charset="0"/>
+                <a:ea typeface="Amiri" pitchFamily="2" charset="-78"/>
                 <a:cs typeface="Amiri" pitchFamily="2" charset="-78"/>
               </a:rPr>
               <a:t>  pl. أَنْظِمَةٌ بِيئِيَّةٌ</a:t>
@@ -44827,6 +45015,7 @@
                   <a:srgbClr val="1B3B6F"/>
                 </a:solidFill>
                 <a:latin typeface="Amiri" pitchFamily="2" charset="-78"/>
+                <a:ea typeface="Amiri" pitchFamily="2" charset="-78"/>
                 <a:cs typeface="Amiri" pitchFamily="2" charset="-78"/>
               </a:rPr>
               <a:t>تَنَوُّعٌ حَيَوِيٌّ</a:t>
@@ -44916,6 +45105,7 @@
                   <a:srgbClr val="1B3B6F"/>
                 </a:solidFill>
                 <a:latin typeface="Amiri" pitchFamily="2" charset="-78"/>
+                <a:ea typeface="Amiri" pitchFamily="2" charset="-78"/>
                 <a:cs typeface="Amiri" pitchFamily="2" charset="-78"/>
               </a:rPr>
               <a:t>مَوْطِنٌ طَبِيعِيٌّ</a:t>
@@ -44962,11 +45152,12 @@
               <a:buNone/>
             </a:pPr>
             <a:r>
-              <a:rPr lang="en-US" sz="1000" i="1" dirty="0">
+              <a:rPr lang="ar-SA" sz="1000" i="1" dirty="0">
                 <a:solidFill>
                   <a:srgbClr val="5A6472"/>
                 </a:solidFill>
                 <a:latin typeface="Calibri" pitchFamily="34" charset="0"/>
+                <a:ea typeface="Amiri" pitchFamily="2" charset="-78"/>
                 <a:cs typeface="Amiri" pitchFamily="2" charset="-78"/>
               </a:rPr>
               <a:t>  pl. مَوَاطِنُ</a:t>
@@ -45005,6 +45196,7 @@
                   <a:srgbClr val="1B3B6F"/>
                 </a:solidFill>
                 <a:latin typeface="Amiri" pitchFamily="2" charset="-78"/>
+                <a:ea typeface="Amiri" pitchFamily="2" charset="-78"/>
                 <a:cs typeface="Amiri" pitchFamily="2" charset="-78"/>
               </a:rPr>
               <a:t>يُهَدِّدُ</a:t>
@@ -45051,11 +45243,12 @@
               <a:buNone/>
             </a:pPr>
             <a:r>
-              <a:rPr lang="en-US" sz="1000" i="1" dirty="0">
+              <a:rPr lang="ar-SA" sz="1000" i="1" dirty="0">
                 <a:solidFill>
                   <a:srgbClr val="5A6472"/>
                 </a:solidFill>
                 <a:latin typeface="Calibri" pitchFamily="34" charset="0"/>
+                <a:ea typeface="Amiri" pitchFamily="2" charset="-78"/>
                 <a:cs typeface="Amiri" pitchFamily="2" charset="-78"/>
               </a:rPr>
               <a:t>  تُهَدِّدُ she / it (f.)</a:t>
@@ -45094,6 +45287,7 @@
                   <a:srgbClr val="1B3B6F"/>
                 </a:solidFill>
                 <a:latin typeface="Amiri" pitchFamily="2" charset="-78"/>
+                <a:ea typeface="Amiri" pitchFamily="2" charset="-78"/>
                 <a:cs typeface="Amiri" pitchFamily="2" charset="-78"/>
               </a:rPr>
               <a:t>لِكَيْ</a:t>
@@ -45262,6 +45456,7 @@
                   <a:srgbClr val="1B3B6F"/>
                 </a:solidFill>
                 <a:latin typeface="Amiri" pitchFamily="2" charset="-78"/>
+                <a:ea typeface="Amiri" pitchFamily="2" charset="-78"/>
                 <a:cs typeface="Amiri" pitchFamily="2" charset="-78"/>
               </a:rPr>
               <a:t>أُرِيدُ أَنْ أَحْمِيَ ______ لِكَيْ ______ .</a:t>
@@ -45931,6 +46126,7 @@
                   <a:srgbClr val="FFFFFF"/>
                 </a:solidFill>
                 <a:latin typeface="Amiri" pitchFamily="2" charset="-78"/>
+                <a:ea typeface="Amiri" pitchFamily="2" charset="-78"/>
                 <a:cs typeface="Amiri" pitchFamily="2" charset="-78"/>
               </a:rPr>
               <a:t>أَحْسَنْتُمْ! إِلَى اللِّقَاءِ</a:t>
@@ -46083,6 +46279,7 @@
                   <a:srgbClr val="D4AF37"/>
                 </a:solidFill>
                 <a:latin typeface="Amiri" pitchFamily="2" charset="-78"/>
+                <a:ea typeface="Amiri" pitchFamily="2" charset="-78"/>
                 <a:cs typeface="Amiri" pitchFamily="2" charset="-78"/>
               </a:rPr>
               <a:t>العَالَمُ الطَّبِيعِيُّ</a:t>
@@ -46216,6 +46413,7 @@
                   <a:srgbClr val="D4AF37"/>
                 </a:solidFill>
                 <a:latin typeface="Amiri" pitchFamily="2" charset="-78"/>
+                <a:ea typeface="Amiri" pitchFamily="2" charset="-78"/>
                 <a:cs typeface="Amiri" pitchFamily="2" charset="-78"/>
               </a:rPr>
               <a:t>م</a:t>
@@ -46536,6 +46734,7 @@
                   <a:srgbClr val="8A6D1E"/>
                 </a:solidFill>
                 <a:latin typeface="Amiri" pitchFamily="2" charset="-78"/>
+                <a:ea typeface="Amiri" pitchFamily="2" charset="-78"/>
                 <a:cs typeface="Amiri" pitchFamily="2" charset="-78"/>
               </a:rPr>
               <a:t>خَرِيطَةُ الدَّرْسِ</a:t>
@@ -46850,6 +47049,7 @@
                   <a:srgbClr val="0E7C86"/>
                 </a:solidFill>
                 <a:latin typeface="Amiri" pitchFamily="2" charset="-78"/>
+                <a:ea typeface="Amiri" pitchFamily="2" charset="-78"/>
                 <a:cs typeface="Amiri" pitchFamily="2" charset="-78"/>
               </a:rPr>
               <a:t>تَهْيِئَةٌ</a:t>
@@ -47126,6 +47326,7 @@
                   <a:srgbClr val="1B3B6F"/>
                 </a:solidFill>
                 <a:latin typeface="Amiri" pitchFamily="2" charset="-78"/>
+                <a:ea typeface="Amiri" pitchFamily="2" charset="-78"/>
                 <a:cs typeface="Amiri" pitchFamily="2" charset="-78"/>
               </a:rPr>
               <a:t>خُطَّةُ التَّقْيِيمِ</a:t>
@@ -47402,6 +47603,7 @@
                   <a:srgbClr val="6B4C9A"/>
                 </a:solidFill>
                 <a:latin typeface="Amiri" pitchFamily="2" charset="-78"/>
+                <a:ea typeface="Amiri" pitchFamily="2" charset="-78"/>
                 <a:cs typeface="Amiri" pitchFamily="2" charset="-78"/>
               </a:rPr>
               <a:t>الاسْتِمَاعُ</a:t>
@@ -47678,6 +47880,7 @@
                   <a:srgbClr val="2F6FB0"/>
                 </a:solidFill>
                 <a:latin typeface="Amiri" pitchFamily="2" charset="-78"/>
+                <a:ea typeface="Amiri" pitchFamily="2" charset="-78"/>
                 <a:cs typeface="Amiri" pitchFamily="2" charset="-78"/>
               </a:rPr>
               <a:t>القِرَاءَةُ</a:t>
@@ -47954,6 +48157,7 @@
                   <a:srgbClr val="1E6B52"/>
                 </a:solidFill>
                 <a:latin typeface="Amiri" pitchFamily="2" charset="-78"/>
+                <a:ea typeface="Amiri" pitchFamily="2" charset="-78"/>
                 <a:cs typeface="Amiri" pitchFamily="2" charset="-78"/>
               </a:rPr>
               <a:t>الكِتَابَةُ وَالتَّحَدُّثُ</a:t>
@@ -48230,6 +48434,7 @@
                   <a:srgbClr val="8A6D1E"/>
                 </a:solidFill>
                 <a:latin typeface="Amiri" pitchFamily="2" charset="-78"/>
+                <a:ea typeface="Amiri" pitchFamily="2" charset="-78"/>
                 <a:cs typeface="Amiri" pitchFamily="2" charset="-78"/>
               </a:rPr>
               <a:t>الهَدَفُ</a:t>
@@ -48506,6 +48711,7 @@
                   <a:srgbClr val="C45A3C"/>
                 </a:solidFill>
                 <a:latin typeface="Amiri" pitchFamily="2" charset="-78"/>
+                <a:ea typeface="Amiri" pitchFamily="2" charset="-78"/>
                 <a:cs typeface="Amiri" pitchFamily="2" charset="-78"/>
               </a:rPr>
               <a:t>اسْتَعِدَّ</a:t>
@@ -48749,6 +48955,7 @@
                   <a:srgbClr val="D4AF37"/>
                 </a:solidFill>
                 <a:latin typeface="Amiri" pitchFamily="2" charset="-78"/>
+                <a:ea typeface="Amiri" pitchFamily="2" charset="-78"/>
                 <a:cs typeface="Amiri" pitchFamily="2" charset="-78"/>
               </a:rPr>
               <a:t>م</a:t>
@@ -49069,6 +49276,7 @@
                   <a:srgbClr val="8A6D1E"/>
                 </a:solidFill>
                 <a:latin typeface="Amiri" pitchFamily="2" charset="-78"/>
+                <a:ea typeface="Amiri" pitchFamily="2" charset="-78"/>
                 <a:cs typeface="Amiri" pitchFamily="2" charset="-78"/>
               </a:rPr>
               <a:t>اِبْدَأِ الآنَ</a:t>
@@ -49255,6 +49463,7 @@
                   <a:srgbClr val="1B3B6F"/>
                 </a:solidFill>
                 <a:latin typeface="Amiri" pitchFamily="2" charset="-78"/>
+                <a:ea typeface="Amiri" pitchFamily="2" charset="-78"/>
                 <a:cs typeface="Amiri" pitchFamily="2" charset="-78"/>
               </a:rPr>
               <a:t>وَكِيلُ سَفَرٍ</a:t>
@@ -49807,6 +50016,7 @@
                   <a:srgbClr val="1F2A37"/>
                 </a:solidFill>
                 <a:latin typeface="Amiri" pitchFamily="2" charset="-78"/>
+                <a:ea typeface="Amiri" pitchFamily="2" charset="-78"/>
                 <a:cs typeface="Amiri" pitchFamily="2" charset="-78"/>
               </a:rPr>
               <a:t>إِذَا زُرْتَ الأُرْدُنَّ، سَتَنْبَهِرُ.</a:t>
@@ -49908,6 +50118,7 @@
                   <a:srgbClr val="1F2A37"/>
                 </a:solidFill>
                 <a:latin typeface="Amiri" pitchFamily="2" charset="-78"/>
+                <a:ea typeface="Amiri" pitchFamily="2" charset="-78"/>
                 <a:cs typeface="Amiri" pitchFamily="2" charset="-78"/>
               </a:rPr>
               <a:t>إِذَا زُرْتَ الأُرْدُنَّ، تَنْبَهِرُ.</a:t>
@@ -50009,6 +50220,7 @@
                   <a:srgbClr val="1F2A37"/>
                 </a:solidFill>
                 <a:latin typeface="Amiri" pitchFamily="2" charset="-78"/>
+                <a:ea typeface="Amiri" pitchFamily="2" charset="-78"/>
                 <a:cs typeface="Amiri" pitchFamily="2" charset="-78"/>
               </a:rPr>
               <a:t>إِذَا تَزُورُ الأُرْدُنَّ، سَتَنْبَهِرُ.</a:t>
@@ -50157,6 +50369,7 @@
                   <a:srgbClr val="1B3B6F"/>
                 </a:solidFill>
                 <a:latin typeface="Amiri" pitchFamily="2" charset="-78"/>
+                <a:ea typeface="Amiri" pitchFamily="2" charset="-78"/>
                 <a:cs typeface="Amiri" pitchFamily="2" charset="-78"/>
               </a:rPr>
               <a:t>حَجَزْتُ الفُنْدُقَ قَبْلَ السَّفَرِ</a:t>
@@ -50271,6 +50484,7 @@
                   <a:srgbClr val="1F2A37"/>
                 </a:solidFill>
                 <a:latin typeface="Amiri" pitchFamily="2" charset="-78"/>
+                <a:ea typeface="Amiri" pitchFamily="2" charset="-78"/>
                 <a:cs typeface="Amiri" pitchFamily="2" charset="-78"/>
               </a:rPr>
               <a:t>سَـ</a:t>
@@ -50372,6 +50586,7 @@
                   <a:srgbClr val="1F2A37"/>
                 </a:solidFill>
                 <a:latin typeface="Amiri" pitchFamily="2" charset="-78"/>
+                <a:ea typeface="Amiri" pitchFamily="2" charset="-78"/>
                 <a:cs typeface="Amiri" pitchFamily="2" charset="-78"/>
               </a:rPr>
               <a:t>إِذَا</a:t>
@@ -50473,6 +50688,7 @@
                   <a:srgbClr val="1F2A37"/>
                 </a:solidFill>
                 <a:latin typeface="Amiri" pitchFamily="2" charset="-78"/>
+                <a:ea typeface="Amiri" pitchFamily="2" charset="-78"/>
                 <a:cs typeface="Amiri" pitchFamily="2" charset="-78"/>
               </a:rPr>
               <a:t>كُنْتُ قَدْ</a:t>
@@ -50621,6 +50837,7 @@
                   <a:srgbClr val="1B3B6F"/>
                 </a:solidFill>
                 <a:latin typeface="Amiri" pitchFamily="2" charset="-78"/>
+                <a:ea typeface="Amiri" pitchFamily="2" charset="-78"/>
                 <a:cs typeface="Amiri" pitchFamily="2" charset="-78"/>
               </a:rPr>
               <a:t>يُسْتَحْسَنُ أَنْ</a:t>
@@ -50647,6 +50864,7 @@
                   <a:srgbClr val="1B3B6F"/>
                 </a:solidFill>
                 <a:latin typeface="Amiri" pitchFamily="2" charset="-78"/>
+                <a:ea typeface="Amiri" pitchFamily="2" charset="-78"/>
                 <a:cs typeface="Amiri" pitchFamily="2" charset="-78"/>
               </a:rPr>
               <a:t>الزَّائِرُ التَّحِيَّةَ</a:t>
@@ -50761,6 +50979,7 @@
                   <a:srgbClr val="1F2A37"/>
                 </a:solidFill>
                 <a:latin typeface="Amiri" pitchFamily="2" charset="-78"/>
+                <a:ea typeface="Amiri" pitchFamily="2" charset="-78"/>
                 <a:cs typeface="Amiri" pitchFamily="2" charset="-78"/>
               </a:rPr>
               <a:t>يَتَعَلَّمُ</a:t>
@@ -50862,6 +51081,7 @@
                   <a:srgbClr val="1F2A37"/>
                 </a:solidFill>
                 <a:latin typeface="Amiri" pitchFamily="2" charset="-78"/>
+                <a:ea typeface="Amiri" pitchFamily="2" charset="-78"/>
                 <a:cs typeface="Amiri" pitchFamily="2" charset="-78"/>
               </a:rPr>
               <a:t>تَعَلَّمَ</a:t>
@@ -50963,6 +51183,7 @@
                   <a:srgbClr val="1F2A37"/>
                 </a:solidFill>
                 <a:latin typeface="Amiri" pitchFamily="2" charset="-78"/>
+                <a:ea typeface="Amiri" pitchFamily="2" charset="-78"/>
                 <a:cs typeface="Amiri" pitchFamily="2" charset="-78"/>
               </a:rPr>
               <a:t>يَتَعَلَّمَ</a:t>
@@ -51111,6 +51332,7 @@
                   <a:srgbClr val="1B3B6F"/>
                 </a:solidFill>
                 <a:latin typeface="Amiri" pitchFamily="2" charset="-78"/>
+                <a:ea typeface="Amiri" pitchFamily="2" charset="-78"/>
                 <a:cs typeface="Amiri" pitchFamily="2" charset="-78"/>
               </a:rPr>
               <a:t>يَسْتَقْطِبُ</a:t>
@@ -51225,6 +51447,7 @@
                   <a:srgbClr val="1F2A37"/>
                 </a:solidFill>
                 <a:latin typeface="Amiri" pitchFamily="2" charset="-78"/>
+                <a:ea typeface="Amiri" pitchFamily="2" charset="-78"/>
                 <a:cs typeface="Amiri" pitchFamily="2" charset="-78"/>
               </a:rPr>
               <a:t>تَسْتَقْطِبُ المَدِينَةُ السُّيَّاحَ.</a:t>
@@ -51326,6 +51549,7 @@
                   <a:srgbClr val="1F2A37"/>
                 </a:solidFill>
                 <a:latin typeface="Amiri" pitchFamily="2" charset="-78"/>
+                <a:ea typeface="Amiri" pitchFamily="2" charset="-78"/>
                 <a:cs typeface="Amiri" pitchFamily="2" charset="-78"/>
               </a:rPr>
               <a:t>تَسْتَقْطِبُ المَدِينَةُ بِالسُّيَّاحِ.</a:t>
@@ -51427,6 +51651,7 @@
                   <a:srgbClr val="1F2A37"/>
                 </a:solidFill>
                 <a:latin typeface="Amiri" pitchFamily="2" charset="-78"/>
+                <a:ea typeface="Amiri" pitchFamily="2" charset="-78"/>
                 <a:cs typeface="Amiri" pitchFamily="2" charset="-78"/>
               </a:rPr>
               <a:t>تَقْطِبُ المَدِينَةُ السُّيَّاحَ.</a:t>
@@ -51762,6 +51987,7 @@
                   <a:srgbClr val="D4AF37"/>
                 </a:solidFill>
                 <a:latin typeface="Amiri" pitchFamily="2" charset="-78"/>
+                <a:ea typeface="Amiri" pitchFamily="2" charset="-78"/>
                 <a:cs typeface="Amiri" pitchFamily="2" charset="-78"/>
               </a:rPr>
               <a:t>م</a:t>
@@ -52082,6 +52308,7 @@
                   <a:srgbClr val="8A6D1E"/>
                 </a:solidFill>
                 <a:latin typeface="Amiri" pitchFamily="2" charset="-78"/>
+                <a:ea typeface="Amiri" pitchFamily="2" charset="-78"/>
                 <a:cs typeface="Amiri" pitchFamily="2" charset="-78"/>
               </a:rPr>
               <a:t>الإِجَابَاتُ وَالتَّعْلِيلُ</a:t>
@@ -52268,6 +52495,7 @@
                   <a:srgbClr val="1B3B6F"/>
                 </a:solidFill>
                 <a:latin typeface="Amiri" pitchFamily="2" charset="-78"/>
+                <a:ea typeface="Amiri" pitchFamily="2" charset="-78"/>
                 <a:cs typeface="Amiri" pitchFamily="2" charset="-78"/>
               </a:rPr>
               <a:t>وَكِيلُ سَفَرٍ</a:t>
@@ -52912,6 +53140,7 @@
                   <a:srgbClr val="1F2A37"/>
                 </a:solidFill>
                 <a:latin typeface="Amiri" pitchFamily="2" charset="-78"/>
+                <a:ea typeface="Amiri" pitchFamily="2" charset="-78"/>
                 <a:cs typeface="Amiri" pitchFamily="2" charset="-78"/>
               </a:rPr>
               <a:t>إِذَا زُرْتَ الأُرْدُنَّ، سَتَنْبَهِرُ.</a:t>
@@ -53013,6 +53242,7 @@
                   <a:srgbClr val="9AA1AB"/>
                 </a:solidFill>
                 <a:latin typeface="Amiri" pitchFamily="2" charset="-78"/>
+                <a:ea typeface="Amiri" pitchFamily="2" charset="-78"/>
                 <a:cs typeface="Amiri" pitchFamily="2" charset="-78"/>
               </a:rPr>
               <a:t>إِذَا زُرْتَ الأُرْدُنَّ، تَنْبَهِرُ.</a:t>
@@ -53114,6 +53344,7 @@
                   <a:srgbClr val="9AA1AB"/>
                 </a:solidFill>
                 <a:latin typeface="Amiri" pitchFamily="2" charset="-78"/>
+                <a:ea typeface="Amiri" pitchFamily="2" charset="-78"/>
                 <a:cs typeface="Amiri" pitchFamily="2" charset="-78"/>
               </a:rPr>
               <a:t>إِذَا تَزُورُ الأُرْدُنَّ، سَتَنْبَهِرُ.</a:t>
@@ -53300,6 +53531,7 @@
                   <a:srgbClr val="1B3B6F"/>
                 </a:solidFill>
                 <a:latin typeface="Amiri" pitchFamily="2" charset="-78"/>
+                <a:ea typeface="Amiri" pitchFamily="2" charset="-78"/>
                 <a:cs typeface="Amiri" pitchFamily="2" charset="-78"/>
               </a:rPr>
               <a:t>حَجَزْتُ الفُنْدُقَ قَبْلَ السَّفَرِ</a:t>
@@ -53414,6 +53646,7 @@
                   <a:srgbClr val="9AA1AB"/>
                 </a:solidFill>
                 <a:latin typeface="Amiri" pitchFamily="2" charset="-78"/>
+                <a:ea typeface="Amiri" pitchFamily="2" charset="-78"/>
                 <a:cs typeface="Amiri" pitchFamily="2" charset="-78"/>
               </a:rPr>
               <a:t>سَـ</a:t>
@@ -53515,6 +53748,7 @@
                   <a:srgbClr val="9AA1AB"/>
                 </a:solidFill>
                 <a:latin typeface="Amiri" pitchFamily="2" charset="-78"/>
+                <a:ea typeface="Amiri" pitchFamily="2" charset="-78"/>
                 <a:cs typeface="Amiri" pitchFamily="2" charset="-78"/>
               </a:rPr>
               <a:t>إِذَا</a:t>
@@ -53643,6 +53877,7 @@
                   <a:srgbClr val="1F2A37"/>
                 </a:solidFill>
                 <a:latin typeface="Amiri" pitchFamily="2" charset="-78"/>
+                <a:ea typeface="Amiri" pitchFamily="2" charset="-78"/>
                 <a:cs typeface="Amiri" pitchFamily="2" charset="-78"/>
               </a:rPr>
               <a:t>كُنْتُ قَدْ</a:t>
@@ -53829,6 +54064,7 @@
                   <a:srgbClr val="1B3B6F"/>
                 </a:solidFill>
                 <a:latin typeface="Amiri" pitchFamily="2" charset="-78"/>
+                <a:ea typeface="Amiri" pitchFamily="2" charset="-78"/>
                 <a:cs typeface="Amiri" pitchFamily="2" charset="-78"/>
               </a:rPr>
               <a:t>يُسْتَحْسَنُ أَنْ</a:t>
@@ -53855,6 +54091,7 @@
                   <a:srgbClr val="1B3B6F"/>
                 </a:solidFill>
                 <a:latin typeface="Amiri" pitchFamily="2" charset="-78"/>
+                <a:ea typeface="Amiri" pitchFamily="2" charset="-78"/>
                 <a:cs typeface="Amiri" pitchFamily="2" charset="-78"/>
               </a:rPr>
               <a:t>الزَّائِرُ التَّحِيَّةَ</a:t>
@@ -53969,6 +54206,7 @@
                   <a:srgbClr val="9AA1AB"/>
                 </a:solidFill>
                 <a:latin typeface="Amiri" pitchFamily="2" charset="-78"/>
+                <a:ea typeface="Amiri" pitchFamily="2" charset="-78"/>
                 <a:cs typeface="Amiri" pitchFamily="2" charset="-78"/>
               </a:rPr>
               <a:t>يَتَعَلَّمُ</a:t>
@@ -54070,6 +54308,7 @@
                   <a:srgbClr val="9AA1AB"/>
                 </a:solidFill>
                 <a:latin typeface="Amiri" pitchFamily="2" charset="-78"/>
+                <a:ea typeface="Amiri" pitchFamily="2" charset="-78"/>
                 <a:cs typeface="Amiri" pitchFamily="2" charset="-78"/>
               </a:rPr>
               <a:t>تَعَلَّمَ</a:t>
@@ -54198,6 +54437,7 @@
                   <a:srgbClr val="1F2A37"/>
                 </a:solidFill>
                 <a:latin typeface="Amiri" pitchFamily="2" charset="-78"/>
+                <a:ea typeface="Amiri" pitchFamily="2" charset="-78"/>
                 <a:cs typeface="Amiri" pitchFamily="2" charset="-78"/>
               </a:rPr>
               <a:t>يَتَعَلَّمَ</a:t>
@@ -54384,6 +54624,7 @@
                   <a:srgbClr val="1B3B6F"/>
                 </a:solidFill>
                 <a:latin typeface="Amiri" pitchFamily="2" charset="-78"/>
+                <a:ea typeface="Amiri" pitchFamily="2" charset="-78"/>
                 <a:cs typeface="Amiri" pitchFamily="2" charset="-78"/>
               </a:rPr>
               <a:t>يَسْتَقْطِبُ</a:t>
@@ -54525,6 +54766,7 @@
                   <a:srgbClr val="1F2A37"/>
                 </a:solidFill>
                 <a:latin typeface="Amiri" pitchFamily="2" charset="-78"/>
+                <a:ea typeface="Amiri" pitchFamily="2" charset="-78"/>
                 <a:cs typeface="Amiri" pitchFamily="2" charset="-78"/>
               </a:rPr>
               <a:t>تَسْتَقْطِبُ المَدِينَةُ السُّيَّاحَ.</a:t>
@@ -54626,6 +54868,7 @@
                   <a:srgbClr val="9AA1AB"/>
                 </a:solidFill>
                 <a:latin typeface="Amiri" pitchFamily="2" charset="-78"/>
+                <a:ea typeface="Amiri" pitchFamily="2" charset="-78"/>
                 <a:cs typeface="Amiri" pitchFamily="2" charset="-78"/>
               </a:rPr>
               <a:t>تَسْتَقْطِبُ المَدِينَةُ بِالسُّيَّاحِ.</a:t>
@@ -54727,6 +54970,7 @@
                   <a:srgbClr val="9AA1AB"/>
                 </a:solidFill>
                 <a:latin typeface="Amiri" pitchFamily="2" charset="-78"/>
+                <a:ea typeface="Amiri" pitchFamily="2" charset="-78"/>
                 <a:cs typeface="Amiri" pitchFamily="2" charset="-78"/>
               </a:rPr>
               <a:t>تَقْطِبُ المَدِينَةُ السُّيَّاحَ.</a:t>
@@ -54916,6 +55160,7 @@
                   <a:srgbClr val="1B3B6F"/>
                 </a:solidFill>
                 <a:latin typeface="Amiri" pitchFamily="2" charset="-78"/>
+                <a:ea typeface="Amiri" pitchFamily="2" charset="-78"/>
                 <a:cs typeface="Amiri" pitchFamily="2" charset="-78"/>
               </a:rPr>
               <a:t>كُنْتُ قَدْ … · إِذَا … سَـ · لَوْ … لَـ · أَنْ يَتَعَلَّمَ</a:t>
@@ -55049,6 +55294,7 @@
                   <a:srgbClr val="D4AF37"/>
                 </a:solidFill>
                 <a:latin typeface="Amiri" pitchFamily="2" charset="-78"/>
+                <a:ea typeface="Amiri" pitchFamily="2" charset="-78"/>
                 <a:cs typeface="Amiri" pitchFamily="2" charset="-78"/>
               </a:rPr>
               <a:t>م</a:t>
@@ -55369,6 +55615,7 @@
                   <a:srgbClr val="8A6D1E"/>
                 </a:solidFill>
                 <a:latin typeface="Amiri" pitchFamily="2" charset="-78"/>
+                <a:ea typeface="Amiri" pitchFamily="2" charset="-78"/>
                 <a:cs typeface="Amiri" pitchFamily="2" charset="-78"/>
               </a:rPr>
               <a:t>مُرَاجَعَةُ القَوَاعِدِ</a:t>
@@ -55649,6 +55896,7 @@
                   <a:srgbClr val="1B3B6F"/>
                 </a:solidFill>
                 <a:latin typeface="Amiri" pitchFamily="2" charset="-78"/>
+                <a:ea typeface="Amiri" pitchFamily="2" charset="-78"/>
                 <a:cs typeface="Amiri" pitchFamily="2" charset="-78"/>
               </a:rPr>
               <a:t>إِذَا زُرْتَ الأُرْدُنَّ، سَتَنْبَهِرُ · لَوْ حَجَزْتُ مُبَكِّرًا، لَوَفَّرْتُ</a:t>
@@ -55855,6 +56103,7 @@
                   <a:srgbClr val="1B3B6F"/>
                 </a:solidFill>
                 <a:latin typeface="Amiri" pitchFamily="2" charset="-78"/>
+                <a:ea typeface="Amiri" pitchFamily="2" charset="-78"/>
                 <a:cs typeface="Amiri" pitchFamily="2" charset="-78"/>
               </a:rPr>
               <a:t>كُنْتُ قَدْ حَجَزْتُ · كَانَتْ قَدْ أَقَامَتْ</a:t>
@@ -56061,6 +56310,7 @@
                   <a:srgbClr val="1B3B6F"/>
                 </a:solidFill>
                 <a:latin typeface="Amiri" pitchFamily="2" charset="-78"/>
+                <a:ea typeface="Amiri" pitchFamily="2" charset="-78"/>
                 <a:cs typeface="Amiri" pitchFamily="2" charset="-78"/>
               </a:rPr>
               <a:t>قَالَ الدَّلِيلُ إِنَّ … · أَشَارَ إِلَى أَنَّ …</a:t>
@@ -56267,6 +56517,7 @@
                   <a:srgbClr val="1B3B6F"/>
                 </a:solidFill>
                 <a:latin typeface="Amiri" pitchFamily="2" charset="-78"/>
+                <a:ea typeface="Amiri" pitchFamily="2" charset="-78"/>
                 <a:cs typeface="Amiri" pitchFamily="2" charset="-78"/>
               </a:rPr>
               <a:t>يُسْتَحْسَنُ أَنْ يَتَعَلَّمَ الزَّائِرُ التَّحِيَّةَ</a:t>
@@ -56408,6 +56659,7 @@
                   <a:srgbClr val="1B3B6F"/>
                 </a:solidFill>
                 <a:latin typeface="Amiri" pitchFamily="2" charset="-78"/>
+                <a:ea typeface="Amiri" pitchFamily="2" charset="-78"/>
                 <a:cs typeface="Amiri" pitchFamily="2" charset="-78"/>
               </a:rPr>
               <a:t>سَأُقِيمُ فِي … · تَسْتَقْطِبُ المَدِينَةُ السُّيَّاحَ · يَصِلُ بَيْنَ</a:t>
@@ -56617,6 +56869,7 @@
                   <a:srgbClr val="D4AF37"/>
                 </a:solidFill>
                 <a:latin typeface="Amiri" pitchFamily="2" charset="-78"/>
+                <a:ea typeface="Amiri" pitchFamily="2" charset="-78"/>
                 <a:cs typeface="Amiri" pitchFamily="2" charset="-78"/>
               </a:rPr>
               <a:t>م</a:t>
@@ -56937,6 +57190,7 @@
                   <a:srgbClr val="8A6D1E"/>
                 </a:solidFill>
                 <a:latin typeface="Amiri" pitchFamily="2" charset="-78"/>
+                <a:ea typeface="Amiri" pitchFamily="2" charset="-78"/>
                 <a:cs typeface="Amiri" pitchFamily="2" charset="-78"/>
               </a:rPr>
               <a:t>خُطَّةُ التَّقْيِيمِ</a:t>
@@ -58071,6 +58325,7 @@
                   <a:srgbClr val="D4AF37"/>
                 </a:solidFill>
                 <a:latin typeface="Amiri" pitchFamily="2" charset="-78"/>
+                <a:ea typeface="Amiri" pitchFamily="2" charset="-78"/>
                 <a:cs typeface="Amiri" pitchFamily="2" charset="-78"/>
               </a:rPr>
               <a:t>م</a:t>
@@ -58391,6 +58646,7 @@
                   <a:srgbClr val="8A6D1E"/>
                 </a:solidFill>
                 <a:latin typeface="Amiri" pitchFamily="2" charset="-78"/>
+                <a:ea typeface="Amiri" pitchFamily="2" charset="-78"/>
                 <a:cs typeface="Amiri" pitchFamily="2" charset="-78"/>
               </a:rPr>
               <a:t>الاسْتِمَاعُ</a:t>
@@ -60314,6 +60570,7 @@
                   <a:srgbClr val="D4AF37"/>
                 </a:solidFill>
                 <a:latin typeface="Amiri" pitchFamily="2" charset="-78"/>
+                <a:ea typeface="Amiri" pitchFamily="2" charset="-78"/>
                 <a:cs typeface="Amiri" pitchFamily="2" charset="-78"/>
               </a:rPr>
               <a:t>م</a:t>
@@ -60634,6 +60891,7 @@
                   <a:srgbClr val="8A6D1E"/>
                 </a:solidFill>
                 <a:latin typeface="Amiri" pitchFamily="2" charset="-78"/>
+                <a:ea typeface="Amiri" pitchFamily="2" charset="-78"/>
                 <a:cs typeface="Amiri" pitchFamily="2" charset="-78"/>
               </a:rPr>
               <a:t>الإِجَابَاتُ</a:t>
@@ -61175,6 +61433,7 @@
                   <a:srgbClr val="8A6D1E"/>
                 </a:solidFill>
                 <a:latin typeface="Amiri" pitchFamily="2" charset="-78"/>
+                <a:ea typeface="Amiri" pitchFamily="2" charset="-78"/>
                 <a:cs typeface="Amiri" pitchFamily="2" charset="-78"/>
               </a:rPr>
               <a:t>كُنْتُ قَدْ حَجَزْتُ رِحْلَتِي … وَكُنْتُ قَدْ أَقَمْتُ فِي فُنْدُقٍ صَغِيرٍ.</a:t>
@@ -61678,6 +61937,7 @@
                   <a:srgbClr val="8A6D1E"/>
                 </a:solidFill>
                 <a:latin typeface="Amiri" pitchFamily="2" charset="-78"/>
+                <a:ea typeface="Amiri" pitchFamily="2" charset="-78"/>
                 <a:cs typeface="Amiri" pitchFamily="2" charset="-78"/>
               </a:rPr>
               <a:t>قَالَ الدَّلِيلُ إِنَّ أَفْضَلَ وَقْتٍ … هُوَ الصَّبَاحُ البَاكِرُ.</a:t>
@@ -62181,6 +62441,7 @@
                   <a:srgbClr val="8A6D1E"/>
                 </a:solidFill>
                 <a:latin typeface="Amiri" pitchFamily="2" charset="-78"/>
+                <a:ea typeface="Amiri" pitchFamily="2" charset="-78"/>
                 <a:cs typeface="Amiri" pitchFamily="2" charset="-78"/>
               </a:rPr>
               <a:t>اسْتَعْمَلْتُ الحَافِلَةَ السِّيَاحِيَّةَ الَّتِي تَصِلُ بَيْنَ المُدُنِ.</a:t>
@@ -62684,6 +62945,7 @@
                   <a:srgbClr val="8A6D1E"/>
                 </a:solidFill>
                 <a:latin typeface="Amiri" pitchFamily="2" charset="-78"/>
+                <a:ea typeface="Amiri" pitchFamily="2" charset="-78"/>
                 <a:cs typeface="Amiri" pitchFamily="2" charset="-78"/>
               </a:rPr>
               <a:t>إِذَا زُرْتُ الأُرْدُنَّ ثَانِيَةً، سَأُخَصِّصُ يَوْمَيْنِ لِلْبَتْرَاءِ.</a:t>
@@ -62782,13 +63044,9 @@
     <a:fontScheme name="Office">
       <a:majorFont>
         <a:latin typeface="Calibri Light" panose="020F0302020204030204"/>
-        <a:ea typeface=""/>
-        <a:cs typeface=""/>
-        <a:font script="Jpan" typeface="游ゴシック Light"/>
-        <a:font script="Hang" typeface="맑은 고딕"/>
-        <a:font script="Hans" typeface="等线 Light"/>
-        <a:font script="Hant" typeface="新細明體"/>
-        <a:font script="Arab" typeface="Times New Roman"/>
+        <a:ea typeface="Amiri" pitchFamily="2" charset="-78"/>
+        <a:cs typeface="Amiri" pitchFamily="2" charset="-78"/>
+        <a:font script="Arab" typeface="Amiri"/>
         <a:font script="Hebr" typeface="Times New Roman"/>
         <a:font script="Thai" typeface="Angsana New"/>
         <a:font script="Ethi" typeface="Nyala"/>
@@ -62834,13 +63092,9 @@
       </a:majorFont>
       <a:minorFont>
         <a:latin typeface="Calibri" panose="020F0502020204030204"/>
-        <a:ea typeface=""/>
-        <a:cs typeface=""/>
-        <a:font script="Jpan" typeface="游ゴシック"/>
-        <a:font script="Hang" typeface="맑은 고딕"/>
-        <a:font script="Hans" typeface="等线"/>
-        <a:font script="Hant" typeface="新細明體"/>
-        <a:font script="Arab" typeface="Arial"/>
+        <a:ea typeface="Amiri" pitchFamily="2" charset="-78"/>
+        <a:cs typeface="Amiri" pitchFamily="2" charset="-78"/>
+        <a:font script="Arab" typeface="Amiri"/>
         <a:font script="Hebr" typeface="Arial"/>
         <a:font script="Thai" typeface="Cordia New"/>
         <a:font script="Ethi" typeface="Nyala"/>
